--- a/docs/slides/pptx/01-ai-family-tree-en.pptx
+++ b/docs/slides/pptx/01-ai-family-tree-en.pptx
@@ -19,6 +19,10 @@
     <p:sldId id="267" r:id="rId18"/>
     <p:sldId id="268" r:id="rId19"/>
     <p:sldId id="269" r:id="rId20"/>
+    <p:sldId id="270" r:id="rId21"/>
+    <p:sldId id="271" r:id="rId22"/>
+    <p:sldId id="272" r:id="rId23"/>
+    <p:sldId id="273" r:id="rId24"/>
   </p:sldIdLst>
   <p:sldSz cx="12191695" cy="6858000" type="screen4x3"/>
   <p:notesSz cx="6858000" cy="9144000"/>
@@ -3175,7 +3179,7 @@
                 </a:solidFill>
                 <a:latin typeface="Segoe UI"/>
               </a:rPr>
-              <a:t>AFRICAN DEVELOPMENT BANK · AU STATAFRIC · STG17 · DAY 1</a:t>
+              <a:t>AFRICAN DEVELOPMENT BANK · AU STATAFRIC · STG17</a:t>
             </a:r>
           </a:p>
         </p:txBody>
@@ -3245,7 +3249,7 @@
                 </a:solidFill>
                 <a:latin typeface="Segoe UI"/>
               </a:rPr>
-              <a:t>How the concepts fit together — and which ones belong in a statistical office</a:t>
+              <a:t>Eight words that will decide what your office buys, builds and can defend</a:t>
             </a:r>
           </a:p>
         </p:txBody>
@@ -3376,32 +3380,118 @@
                 </a:solidFill>
                 <a:latin typeface="Segoe UI"/>
               </a:rPr>
-              <a:t>Where each concept belongs in the statistical value chain</a:t>
-            </a:r>
-          </a:p>
-        </p:txBody>
-      </p:sp>
-      <p:sp>
-        <p:nvSpPr>
-          <p:cNvPr id="4" name="Rectangle 3"/>
+              <a:t>RAG — what you build at 14:45</a:t>
+            </a:r>
+          </a:p>
+        </p:txBody>
+      </p:sp>
+      <p:sp>
+        <p:nvSpPr>
+          <p:cNvPr id="4" name="TextBox 3"/>
+          <p:cNvSpPr txBox="1"/>
+          <p:nvPr/>
+        </p:nvSpPr>
+        <p:spPr>
+          <a:xfrm>
+            <a:off x="731520" y="1371600"/>
+            <a:ext cx="10728655" cy="640080"/>
+          </a:xfrm>
+          <a:prstGeom prst="rect">
+            <a:avLst/>
+          </a:prstGeom>
+          <a:noFill/>
+        </p:spPr>
+        <p:txBody>
+          <a:bodyPr wrap="square">
+            <a:spAutoFit/>
+          </a:bodyPr>
+          <a:lstStyle/>
+          <a:p>
+            <a:pPr algn="l"/>
+            <a:r>
+              <a:rPr sz="1100" b="0">
+                <a:solidFill>
+                  <a:srgbClr val="6B7B75"/>
+                </a:solidFill>
+                <a:latin typeface="Segoe UI"/>
+              </a:rPr>
+              <a:t>FIGURE — screenshot slide 10 of the HTML deck and paste it here.</a:t>
+            </a:r>
+          </a:p>
+        </p:txBody>
+      </p:sp>
+      <p:sp>
+        <p:nvSpPr>
+          <p:cNvPr id="5" name="TextBox 4"/>
+          <p:cNvSpPr txBox="1"/>
+          <p:nvPr/>
+        </p:nvSpPr>
+        <p:spPr>
+          <a:xfrm>
+            <a:off x="731520" y="6400800"/>
+            <a:ext cx="10728655" cy="274320"/>
+          </a:xfrm>
+          <a:prstGeom prst="rect">
+            <a:avLst/>
+          </a:prstGeom>
+          <a:noFill/>
+        </p:spPr>
+        <p:txBody>
+          <a:bodyPr wrap="square">
+            <a:spAutoFit/>
+          </a:bodyPr>
+          <a:lstStyle/>
+          <a:p>
+            <a:pPr algn="l"/>
+            <a:r>
+              <a:rPr sz="900" b="0">
+                <a:solidFill>
+                  <a:srgbClr val="6B7B75"/>
+                </a:solidFill>
+                <a:latin typeface="Segoe UI"/>
+              </a:rPr>
+              <a:t>African Development Bank · AU STATAFRIC · STG17</a:t>
+            </a:r>
+          </a:p>
+        </p:txBody>
+      </p:sp>
+    </p:spTree>
+  </p:cSld>
+  <p:clrMapOvr>
+    <a:masterClrMapping/>
+  </p:clrMapOvr>
+</p:sld>
+</file>
+
+<file path=ppt/slides/slide11.xml><?xml version="1.0" encoding="utf-8"?>
+<p:sld xmlns:a="http://schemas.openxmlformats.org/drawingml/2006/main" xmlns:p="http://schemas.openxmlformats.org/presentationml/2006/main" xmlns:r="http://schemas.openxmlformats.org/officeDocument/2006/relationships">
+  <p:cSld>
+    <p:spTree>
+      <p:nvGrpSpPr>
+        <p:cNvPr id="1" name=""/>
+        <p:cNvGrpSpPr/>
+        <p:nvPr/>
+      </p:nvGrpSpPr>
+      <p:grpSpPr/>
+      <p:sp>
+        <p:nvSpPr>
+          <p:cNvPr id="2" name="Rectangle 1"/>
           <p:cNvSpPr/>
           <p:nvPr/>
         </p:nvSpPr>
         <p:spPr>
           <a:xfrm>
-            <a:off x="731520" y="1371600"/>
-            <a:ext cx="10728655" cy="960120"/>
+            <a:off x="0" y="0"/>
+            <a:ext cx="12191695" cy="6858000"/>
           </a:xfrm>
           <a:prstGeom prst="rect">
             <a:avLst/>
           </a:prstGeom>
           <a:solidFill>
-            <a:srgbClr val="F4F8F5"/>
+            <a:srgbClr val="0B2545"/>
           </a:solidFill>
           <a:ln>
-            <a:solidFill>
-              <a:srgbClr val="1B7A43"/>
-            </a:solidFill>
+            <a:noFill/>
           </a:ln>
           <a:effectLst/>
         </p:spPr>
@@ -3420,38 +3510,855 @@
           </a:fontRef>
         </p:style>
         <p:txBody>
-          <a:bodyPr rtlCol="0" anchor="ctr" wrap="square"/>
+          <a:bodyPr rtlCol="0" anchor="ctr"/>
           <a:lstStyle/>
           <a:p>
             <a:pPr algn="ctr"/>
-            <a:r>
-              <a:rPr sz="1200">
-                <a:solidFill>
-                  <a:srgbClr val="33403A"/>
+          </a:p>
+        </p:txBody>
+      </p:sp>
+      <p:sp>
+        <p:nvSpPr>
+          <p:cNvPr id="3" name="TextBox 2"/>
+          <p:cNvSpPr txBox="1"/>
+          <p:nvPr/>
+        </p:nvSpPr>
+        <p:spPr>
+          <a:xfrm>
+            <a:off x="731520" y="502920"/>
+            <a:ext cx="10728655" cy="320040"/>
+          </a:xfrm>
+          <a:prstGeom prst="rect">
+            <a:avLst/>
+          </a:prstGeom>
+          <a:noFill/>
+        </p:spPr>
+        <p:txBody>
+          <a:bodyPr wrap="square">
+            <a:spAutoFit/>
+          </a:bodyPr>
+          <a:lstStyle/>
+          <a:p>
+            <a:pPr algn="l"/>
+            <a:r>
+              <a:rPr sz="1100" b="1">
+                <a:solidFill>
+                  <a:srgbClr val="F2A900"/>
                 </a:solidFill>
                 <a:latin typeface="Segoe UI"/>
               </a:rPr>
-              <a:t>THERE IS AN INTERNATIONAL FRAMEWORK FOR THIS — The UNECE High-Level Group for the Modernisation of Official Statistics has
-published  Machine Learning for Official Statistics , including a
- quality framework  for choosing methods and guidance on moving from
-experiment to production. Your office does not have to invent its own criteria —
-and a proposal that ignores an existing international framework is easier to
-challenge than one that engages with it.</a:t>
+              <a:t>PART 3 OF 3</a:t>
+            </a:r>
+          </a:p>
+        </p:txBody>
+      </p:sp>
+      <p:sp>
+        <p:nvSpPr>
+          <p:cNvPr id="4" name="TextBox 3"/>
+          <p:cNvSpPr txBox="1"/>
+          <p:nvPr/>
+        </p:nvSpPr>
+        <p:spPr>
+          <a:xfrm>
+            <a:off x="731520" y="914400"/>
+            <a:ext cx="10728655" cy="914400"/>
+          </a:xfrm>
+          <a:prstGeom prst="rect">
+            <a:avLst/>
+          </a:prstGeom>
+          <a:noFill/>
+        </p:spPr>
+        <p:txBody>
+          <a:bodyPr wrap="square">
+            <a:spAutoFit/>
+          </a:bodyPr>
+          <a:lstStyle/>
+          <a:p>
+            <a:pPr algn="l"/>
+            <a:r>
+              <a:rPr sz="2800" b="1">
+                <a:solidFill>
+                  <a:srgbClr val="FFFFFF"/>
+                </a:solidFill>
+                <a:latin typeface="Segoe UI"/>
+              </a:rPr>
+              <a:t>Agents, and where the human goes</a:t>
+            </a:r>
+          </a:p>
+        </p:txBody>
+      </p:sp>
+      <p:sp>
+        <p:nvSpPr>
+          <p:cNvPr id="5" name="TextBox 4"/>
+          <p:cNvSpPr txBox="1"/>
+          <p:nvPr/>
+        </p:nvSpPr>
+        <p:spPr>
+          <a:xfrm>
+            <a:off x="731520" y="1783080"/>
+            <a:ext cx="10728655" cy="548640"/>
+          </a:xfrm>
+          <a:prstGeom prst="rect">
+            <a:avLst/>
+          </a:prstGeom>
+          <a:noFill/>
+        </p:spPr>
+        <p:txBody>
+          <a:bodyPr wrap="square">
+            <a:spAutoFit/>
+          </a:bodyPr>
+          <a:lstStyle/>
+          <a:p>
+            <a:pPr algn="l"/>
+            <a:r>
+              <a:rPr sz="1400" b="0">
+                <a:solidFill>
+                  <a:srgbClr val="DBE7E0"/>
+                </a:solidFill>
+                <a:latin typeface="Segoe UI"/>
+              </a:rPr>
+              <a:t>From answering a question to taking an action.</a:t>
+            </a:r>
+          </a:p>
+        </p:txBody>
+      </p:sp>
+      <p:sp>
+        <p:nvSpPr>
+          <p:cNvPr id="6" name="TextBox 5"/>
+          <p:cNvSpPr txBox="1"/>
+          <p:nvPr/>
+        </p:nvSpPr>
+        <p:spPr>
+          <a:xfrm>
+            <a:off x="731520" y="6400800"/>
+            <a:ext cx="10728655" cy="274320"/>
+          </a:xfrm>
+          <a:prstGeom prst="rect">
+            <a:avLst/>
+          </a:prstGeom>
+          <a:noFill/>
+        </p:spPr>
+        <p:txBody>
+          <a:bodyPr wrap="square">
+            <a:spAutoFit/>
+          </a:bodyPr>
+          <a:lstStyle/>
+          <a:p>
+            <a:pPr algn="l"/>
+            <a:r>
+              <a:rPr sz="900" b="0">
+                <a:solidFill>
+                  <a:srgbClr val="6B7B75"/>
+                </a:solidFill>
+                <a:latin typeface="Segoe UI"/>
+              </a:rPr>
+              <a:t>African Development Bank · AU STATAFRIC · STG17</a:t>
+            </a:r>
+          </a:p>
+        </p:txBody>
+      </p:sp>
+    </p:spTree>
+  </p:cSld>
+  <p:clrMapOvr>
+    <a:masterClrMapping/>
+  </p:clrMapOvr>
+</p:sld>
+</file>
+
+<file path=ppt/slides/slide12.xml><?xml version="1.0" encoding="utf-8"?>
+<p:sld xmlns:a="http://schemas.openxmlformats.org/drawingml/2006/main" xmlns:p="http://schemas.openxmlformats.org/presentationml/2006/main" xmlns:r="http://schemas.openxmlformats.org/officeDocument/2006/relationships">
+  <p:cSld>
+    <p:spTree>
+      <p:nvGrpSpPr>
+        <p:cNvPr id="1" name=""/>
+        <p:cNvGrpSpPr/>
+        <p:nvPr/>
+      </p:nvGrpSpPr>
+      <p:grpSpPr/>
+      <p:sp>
+        <p:nvSpPr>
+          <p:cNvPr id="2" name="Rectangle 1"/>
+          <p:cNvSpPr/>
+          <p:nvPr/>
+        </p:nvSpPr>
+        <p:spPr>
+          <a:xfrm>
+            <a:off x="0" y="0"/>
+            <a:ext cx="12191695" cy="60000"/>
+          </a:xfrm>
+          <a:prstGeom prst="rect">
+            <a:avLst/>
+          </a:prstGeom>
+          <a:solidFill>
+            <a:srgbClr val="F2A900"/>
+          </a:solidFill>
+          <a:ln>
+            <a:noFill/>
+          </a:ln>
+        </p:spPr>
+        <p:style>
+          <a:lnRef idx="1">
+            <a:schemeClr val="accent1"/>
+          </a:lnRef>
+          <a:fillRef idx="3">
+            <a:schemeClr val="accent1"/>
+          </a:fillRef>
+          <a:effectRef idx="2">
+            <a:schemeClr val="accent1"/>
+          </a:effectRef>
+          <a:fontRef idx="minor">
+            <a:schemeClr val="lt1"/>
+          </a:fontRef>
+        </p:style>
+        <p:txBody>
+          <a:bodyPr rtlCol="0" anchor="ctr"/>
+          <a:lstStyle/>
+          <a:p>
+            <a:pPr algn="ctr"/>
+          </a:p>
+        </p:txBody>
+      </p:sp>
+      <p:sp>
+        <p:nvSpPr>
+          <p:cNvPr id="3" name="TextBox 2"/>
+          <p:cNvSpPr txBox="1"/>
+          <p:nvPr/>
+        </p:nvSpPr>
+        <p:spPr>
+          <a:xfrm>
+            <a:off x="731520" y="502920"/>
+            <a:ext cx="10728655" cy="914400"/>
+          </a:xfrm>
+          <a:prstGeom prst="rect">
+            <a:avLst/>
+          </a:prstGeom>
+          <a:noFill/>
+        </p:spPr>
+        <p:txBody>
+          <a:bodyPr wrap="square">
+            <a:spAutoFit/>
+          </a:bodyPr>
+          <a:lstStyle/>
+          <a:p>
+            <a:pPr algn="l"/>
+            <a:r>
+              <a:rPr sz="2800" b="1">
+                <a:solidFill>
+                  <a:srgbClr val="0B2545"/>
+                </a:solidFill>
+                <a:latin typeface="Segoe UI"/>
+              </a:rPr>
+              <a:t>Assistant versus agent</a:t>
             </a:r>
           </a:p>
         </p:txBody>
       </p:sp>
       <p:graphicFrame>
         <p:nvGraphicFramePr>
-          <p:cNvPr id="5" name="Table 4"/>
+          <p:cNvPr id="4" name="Table 3"/>
           <p:cNvGraphicFramePr>
             <a:graphicFrameLocks noGrp="1"/>
           </p:cNvGraphicFramePr>
           <p:nvPr/>
         </p:nvGraphicFramePr>
         <p:xfrm>
-          <a:off x="731520" y="2468880"/>
-          <a:ext cx="10728655" cy="2048256"/>
+          <a:off x="731520" y="1371600"/>
+          <a:ext cx="10728655" cy="1463040"/>
+        </p:xfrm>
+        <a:graphic>
+          <a:graphicData uri="http://schemas.openxmlformats.org/drawingml/2006/table">
+            <a:tbl>
+              <a:tblPr firstRow="1" bandRow="1">
+                <a:tableStyleId>{5C22544A-7EE6-4342-B048-85BDC9FD1C3A}</a:tableStyleId>
+              </a:tblPr>
+              <a:tblGrid>
+                <a:gridCol w="3576218"/>
+                <a:gridCol w="3576218"/>
+                <a:gridCol w="3576219"/>
+              </a:tblGrid>
+              <a:tr h="292608">
+                <a:tc>
+                  <a:txBody>
+                    <a:bodyPr/>
+                    <a:lstStyle/>
+                    <a:p/>
+                  </a:txBody>
+                  <a:tcPr/>
+                </a:tc>
+                <a:tc>
+                  <a:txBody>
+                    <a:bodyPr/>
+                    <a:lstStyle/>
+                    <a:p>
+                      <a:r>
+                        <a:rPr sz="1000" b="1">
+                          <a:solidFill>
+                            <a:srgbClr val="FFFFFF"/>
+                          </a:solidFill>
+                          <a:latin typeface="Segoe UI"/>
+                        </a:rPr>
+                        <a:t>Assistant · 14:45</a:t>
+                      </a:r>
+                    </a:p>
+                  </a:txBody>
+                  <a:tcPr/>
+                </a:tc>
+                <a:tc>
+                  <a:txBody>
+                    <a:bodyPr/>
+                    <a:lstStyle/>
+                    <a:p>
+                      <a:r>
+                        <a:rPr sz="1000" b="1">
+                          <a:solidFill>
+                            <a:srgbClr val="FFFFFF"/>
+                          </a:solidFill>
+                          <a:latin typeface="Segoe UI"/>
+                        </a:rPr>
+                        <a:t>Agent · 15:45</a:t>
+                      </a:r>
+                    </a:p>
+                  </a:txBody>
+                  <a:tcPr/>
+                </a:tc>
+              </a:tr>
+              <a:tr h="292608">
+                <a:tc>
+                  <a:txBody>
+                    <a:bodyPr/>
+                    <a:lstStyle/>
+                    <a:p>
+                      <a:r>
+                        <a:rPr sz="1000" b="0">
+                          <a:solidFill>
+                            <a:srgbClr val="33403A"/>
+                          </a:solidFill>
+                          <a:latin typeface="Segoe UI"/>
+                        </a:rPr>
+                        <a:t>Does</a:t>
+                      </a:r>
+                    </a:p>
+                  </a:txBody>
+                  <a:tcPr/>
+                </a:tc>
+                <a:tc>
+                  <a:txBody>
+                    <a:bodyPr/>
+                    <a:lstStyle/>
+                    <a:p>
+                      <a:r>
+                        <a:rPr sz="1000" b="0">
+                          <a:solidFill>
+                            <a:srgbClr val="33403A"/>
+                          </a:solidFill>
+                          <a:latin typeface="Segoe UI"/>
+                        </a:rPr>
+                        <a:t>Reads, writes an answer</a:t>
+                      </a:r>
+                    </a:p>
+                  </a:txBody>
+                  <a:tcPr/>
+                </a:tc>
+                <a:tc>
+                  <a:txBody>
+                    <a:bodyPr/>
+                    <a:lstStyle/>
+                    <a:p>
+                      <a:r>
+                        <a:rPr sz="1000" b="0">
+                          <a:solidFill>
+                            <a:srgbClr val="33403A"/>
+                          </a:solidFill>
+                          <a:latin typeface="Segoe UI"/>
+                        </a:rPr>
+                        <a:t>Reads, picks a tool, calls it, repeats</a:t>
+                      </a:r>
+                    </a:p>
+                  </a:txBody>
+                  <a:tcPr/>
+                </a:tc>
+              </a:tr>
+              <a:tr h="292608">
+                <a:tc>
+                  <a:txBody>
+                    <a:bodyPr/>
+                    <a:lstStyle/>
+                    <a:p>
+                      <a:r>
+                        <a:rPr sz="1000" b="0">
+                          <a:solidFill>
+                            <a:srgbClr val="33403A"/>
+                          </a:solidFill>
+                          <a:latin typeface="Segoe UI"/>
+                        </a:rPr>
+                        <a:t>Chooses the steps</a:t>
+                      </a:r>
+                    </a:p>
+                  </a:txBody>
+                  <a:tcPr/>
+                </a:tc>
+                <a:tc>
+                  <a:txBody>
+                    <a:bodyPr/>
+                    <a:lstStyle/>
+                    <a:p>
+                      <a:r>
+                        <a:rPr sz="1000" b="0">
+                          <a:solidFill>
+                            <a:srgbClr val="33403A"/>
+                          </a:solidFill>
+                          <a:latin typeface="Segoe UI"/>
+                        </a:rPr>
+                        <a:t>You did, in the pipeline</a:t>
+                      </a:r>
+                    </a:p>
+                  </a:txBody>
+                  <a:tcPr/>
+                </a:tc>
+                <a:tc>
+                  <a:txBody>
+                    <a:bodyPr/>
+                    <a:lstStyle/>
+                    <a:p>
+                      <a:r>
+                        <a:rPr sz="1000" b="0">
+                          <a:solidFill>
+                            <a:srgbClr val="33403A"/>
+                          </a:solidFill>
+                          <a:latin typeface="Segoe UI"/>
+                        </a:rPr>
+                        <a:t>The model, at run time</a:t>
+                      </a:r>
+                    </a:p>
+                  </a:txBody>
+                  <a:tcPr/>
+                </a:tc>
+              </a:tr>
+              <a:tr h="292608">
+                <a:tc>
+                  <a:txBody>
+                    <a:bodyPr/>
+                    <a:lstStyle/>
+                    <a:p>
+                      <a:r>
+                        <a:rPr sz="1000" b="0">
+                          <a:solidFill>
+                            <a:srgbClr val="33403A"/>
+                          </a:solidFill>
+                          <a:latin typeface="Segoe UI"/>
+                        </a:rPr>
+                        <a:t>Failure is</a:t>
+                      </a:r>
+                    </a:p>
+                  </a:txBody>
+                  <a:tcPr/>
+                </a:tc>
+                <a:tc>
+                  <a:txBody>
+                    <a:bodyPr/>
+                    <a:lstStyle/>
+                    <a:p>
+                      <a:r>
+                        <a:rPr sz="1000" b="0">
+                          <a:solidFill>
+                            <a:srgbClr val="33403A"/>
+                          </a:solidFill>
+                          <a:latin typeface="Segoe UI"/>
+                        </a:rPr>
+                        <a:t>A wrong sentence</a:t>
+                      </a:r>
+                    </a:p>
+                  </a:txBody>
+                  <a:tcPr/>
+                </a:tc>
+                <a:tc>
+                  <a:txBody>
+                    <a:bodyPr/>
+                    <a:lstStyle/>
+                    <a:p>
+                      <a:r>
+                        <a:rPr sz="1000" b="0">
+                          <a:solidFill>
+                            <a:srgbClr val="33403A"/>
+                          </a:solidFill>
+                          <a:latin typeface="Segoe UI"/>
+                        </a:rPr>
+                        <a:t>A wrong sentence — or a wrong action</a:t>
+                      </a:r>
+                    </a:p>
+                  </a:txBody>
+                  <a:tcPr/>
+                </a:tc>
+              </a:tr>
+              <a:tr h="292608">
+                <a:tc>
+                  <a:txBody>
+                    <a:bodyPr/>
+                    <a:lstStyle/>
+                    <a:p>
+                      <a:r>
+                        <a:rPr sz="1000" b="0">
+                          <a:solidFill>
+                            <a:srgbClr val="33403A"/>
+                          </a:solidFill>
+                          <a:latin typeface="Segoe UI"/>
+                        </a:rPr>
+                        <a:t>Human checks</a:t>
+                      </a:r>
+                    </a:p>
+                  </a:txBody>
+                  <a:tcPr/>
+                </a:tc>
+                <a:tc>
+                  <a:txBody>
+                    <a:bodyPr/>
+                    <a:lstStyle/>
+                    <a:p>
+                      <a:r>
+                        <a:rPr sz="1000" b="0">
+                          <a:solidFill>
+                            <a:srgbClr val="33403A"/>
+                          </a:solidFill>
+                          <a:latin typeface="Segoe UI"/>
+                        </a:rPr>
+                        <a:t>The output</a:t>
+                      </a:r>
+                    </a:p>
+                  </a:txBody>
+                  <a:tcPr/>
+                </a:tc>
+                <a:tc>
+                  <a:txBody>
+                    <a:bodyPr/>
+                    <a:lstStyle/>
+                    <a:p>
+                      <a:r>
+                        <a:rPr sz="1000" b="0">
+                          <a:solidFill>
+                            <a:srgbClr val="33403A"/>
+                          </a:solidFill>
+                          <a:latin typeface="Segoe UI"/>
+                        </a:rPr>
+                        <a:t>The output  and  each action</a:t>
+                      </a:r>
+                    </a:p>
+                  </a:txBody>
+                  <a:tcPr/>
+                </a:tc>
+              </a:tr>
+            </a:tbl>
+          </a:graphicData>
+        </a:graphic>
+      </p:graphicFrame>
+      <p:sp>
+        <p:nvSpPr>
+          <p:cNvPr id="5" name="TextBox 4"/>
+          <p:cNvSpPr txBox="1"/>
+          <p:nvPr/>
+        </p:nvSpPr>
+        <p:spPr>
+          <a:xfrm>
+            <a:off x="731520" y="6400800"/>
+            <a:ext cx="10728655" cy="274320"/>
+          </a:xfrm>
+          <a:prstGeom prst="rect">
+            <a:avLst/>
+          </a:prstGeom>
+          <a:noFill/>
+        </p:spPr>
+        <p:txBody>
+          <a:bodyPr wrap="square">
+            <a:spAutoFit/>
+          </a:bodyPr>
+          <a:lstStyle/>
+          <a:p>
+            <a:pPr algn="l"/>
+            <a:r>
+              <a:rPr sz="900" b="0">
+                <a:solidFill>
+                  <a:srgbClr val="6B7B75"/>
+                </a:solidFill>
+                <a:latin typeface="Segoe UI"/>
+              </a:rPr>
+              <a:t>African Development Bank · AU STATAFRIC · STG17</a:t>
+            </a:r>
+          </a:p>
+        </p:txBody>
+      </p:sp>
+    </p:spTree>
+  </p:cSld>
+  <p:clrMapOvr>
+    <a:masterClrMapping/>
+  </p:clrMapOvr>
+</p:sld>
+</file>
+
+<file path=ppt/slides/slide13.xml><?xml version="1.0" encoding="utf-8"?>
+<p:sld xmlns:a="http://schemas.openxmlformats.org/drawingml/2006/main" xmlns:p="http://schemas.openxmlformats.org/presentationml/2006/main" xmlns:r="http://schemas.openxmlformats.org/officeDocument/2006/relationships">
+  <p:cSld>
+    <p:spTree>
+      <p:nvGrpSpPr>
+        <p:cNvPr id="1" name=""/>
+        <p:cNvGrpSpPr/>
+        <p:nvPr/>
+      </p:nvGrpSpPr>
+      <p:grpSpPr/>
+      <p:sp>
+        <p:nvSpPr>
+          <p:cNvPr id="2" name="Rectangle 1"/>
+          <p:cNvSpPr/>
+          <p:nvPr/>
+        </p:nvSpPr>
+        <p:spPr>
+          <a:xfrm>
+            <a:off x="0" y="0"/>
+            <a:ext cx="12191695" cy="60000"/>
+          </a:xfrm>
+          <a:prstGeom prst="rect">
+            <a:avLst/>
+          </a:prstGeom>
+          <a:solidFill>
+            <a:srgbClr val="F2A900"/>
+          </a:solidFill>
+          <a:ln>
+            <a:noFill/>
+          </a:ln>
+        </p:spPr>
+        <p:style>
+          <a:lnRef idx="1">
+            <a:schemeClr val="accent1"/>
+          </a:lnRef>
+          <a:fillRef idx="3">
+            <a:schemeClr val="accent1"/>
+          </a:fillRef>
+          <a:effectRef idx="2">
+            <a:schemeClr val="accent1"/>
+          </a:effectRef>
+          <a:fontRef idx="minor">
+            <a:schemeClr val="lt1"/>
+          </a:fontRef>
+        </p:style>
+        <p:txBody>
+          <a:bodyPr rtlCol="0" anchor="ctr"/>
+          <a:lstStyle/>
+          <a:p>
+            <a:pPr algn="ctr"/>
+          </a:p>
+        </p:txBody>
+      </p:sp>
+      <p:sp>
+        <p:nvSpPr>
+          <p:cNvPr id="3" name="TextBox 2"/>
+          <p:cNvSpPr txBox="1"/>
+          <p:nvPr/>
+        </p:nvSpPr>
+        <p:spPr>
+          <a:xfrm>
+            <a:off x="731520" y="502920"/>
+            <a:ext cx="10728655" cy="320040"/>
+          </a:xfrm>
+          <a:prstGeom prst="rect">
+            <a:avLst/>
+          </a:prstGeom>
+          <a:noFill/>
+        </p:spPr>
+        <p:txBody>
+          <a:bodyPr wrap="square">
+            <a:spAutoFit/>
+          </a:bodyPr>
+          <a:lstStyle/>
+          <a:p>
+            <a:pPr algn="l"/>
+            <a:r>
+              <a:rPr sz="1100" b="1">
+                <a:solidFill>
+                  <a:srgbClr val="1B7A43"/>
+                </a:solidFill>
+                <a:latin typeface="Segoe UI"/>
+              </a:rPr>
+              <a:t>THE GAP THAT MATTERS</a:t>
+            </a:r>
+          </a:p>
+        </p:txBody>
+      </p:sp>
+      <p:sp>
+        <p:nvSpPr>
+          <p:cNvPr id="4" name="TextBox 3"/>
+          <p:cNvSpPr txBox="1"/>
+          <p:nvPr/>
+        </p:nvSpPr>
+        <p:spPr>
+          <a:xfrm>
+            <a:off x="731520" y="914400"/>
+            <a:ext cx="10728655" cy="548640"/>
+          </a:xfrm>
+          <a:prstGeom prst="rect">
+            <a:avLst/>
+          </a:prstGeom>
+          <a:noFill/>
+        </p:spPr>
+        <p:txBody>
+          <a:bodyPr wrap="square">
+            <a:spAutoFit/>
+          </a:bodyPr>
+          <a:lstStyle/>
+          <a:p>
+            <a:pPr algn="l"/>
+            <a:r>
+              <a:rPr sz="1400" b="0">
+                <a:solidFill>
+                  <a:srgbClr val="33403A"/>
+                </a:solidFill>
+                <a:latin typeface="Segoe UI"/>
+              </a:rPr>
+              <a:t>Every approval gate, audit log and safety check lives in that gap. Design it
+before you need it — it cannot be added afterwards.</a:t>
+            </a:r>
+          </a:p>
+        </p:txBody>
+      </p:sp>
+      <p:sp>
+        <p:nvSpPr>
+          <p:cNvPr id="5" name="TextBox 4"/>
+          <p:cNvSpPr txBox="1"/>
+          <p:nvPr/>
+        </p:nvSpPr>
+        <p:spPr>
+          <a:xfrm>
+            <a:off x="731520" y="6400800"/>
+            <a:ext cx="10728655" cy="274320"/>
+          </a:xfrm>
+          <a:prstGeom prst="rect">
+            <a:avLst/>
+          </a:prstGeom>
+          <a:noFill/>
+        </p:spPr>
+        <p:txBody>
+          <a:bodyPr wrap="square">
+            <a:spAutoFit/>
+          </a:bodyPr>
+          <a:lstStyle/>
+          <a:p>
+            <a:pPr algn="l"/>
+            <a:r>
+              <a:rPr sz="900" b="0">
+                <a:solidFill>
+                  <a:srgbClr val="6B7B75"/>
+                </a:solidFill>
+                <a:latin typeface="Segoe UI"/>
+              </a:rPr>
+              <a:t>African Development Bank · AU STATAFRIC · STG17</a:t>
+            </a:r>
+          </a:p>
+        </p:txBody>
+      </p:sp>
+    </p:spTree>
+  </p:cSld>
+  <p:clrMapOvr>
+    <a:masterClrMapping/>
+  </p:clrMapOvr>
+</p:sld>
+</file>
+
+<file path=ppt/slides/slide14.xml><?xml version="1.0" encoding="utf-8"?>
+<p:sld xmlns:a="http://schemas.openxmlformats.org/drawingml/2006/main" xmlns:p="http://schemas.openxmlformats.org/presentationml/2006/main" xmlns:r="http://schemas.openxmlformats.org/officeDocument/2006/relationships">
+  <p:cSld>
+    <p:spTree>
+      <p:nvGrpSpPr>
+        <p:cNvPr id="1" name=""/>
+        <p:cNvGrpSpPr/>
+        <p:nvPr/>
+      </p:nvGrpSpPr>
+      <p:grpSpPr/>
+      <p:sp>
+        <p:nvSpPr>
+          <p:cNvPr id="2" name="Rectangle 1"/>
+          <p:cNvSpPr/>
+          <p:nvPr/>
+        </p:nvSpPr>
+        <p:spPr>
+          <a:xfrm>
+            <a:off x="0" y="0"/>
+            <a:ext cx="12191695" cy="60000"/>
+          </a:xfrm>
+          <a:prstGeom prst="rect">
+            <a:avLst/>
+          </a:prstGeom>
+          <a:solidFill>
+            <a:srgbClr val="F2A900"/>
+          </a:solidFill>
+          <a:ln>
+            <a:noFill/>
+          </a:ln>
+        </p:spPr>
+        <p:style>
+          <a:lnRef idx="1">
+            <a:schemeClr val="accent1"/>
+          </a:lnRef>
+          <a:fillRef idx="3">
+            <a:schemeClr val="accent1"/>
+          </a:fillRef>
+          <a:effectRef idx="2">
+            <a:schemeClr val="accent1"/>
+          </a:effectRef>
+          <a:fontRef idx="minor">
+            <a:schemeClr val="lt1"/>
+          </a:fontRef>
+        </p:style>
+        <p:txBody>
+          <a:bodyPr rtlCol="0" anchor="ctr"/>
+          <a:lstStyle/>
+          <a:p>
+            <a:pPr algn="ctr"/>
+          </a:p>
+        </p:txBody>
+      </p:sp>
+      <p:sp>
+        <p:nvSpPr>
+          <p:cNvPr id="3" name="TextBox 2"/>
+          <p:cNvSpPr txBox="1"/>
+          <p:nvPr/>
+        </p:nvSpPr>
+        <p:spPr>
+          <a:xfrm>
+            <a:off x="731520" y="502920"/>
+            <a:ext cx="10728655" cy="914400"/>
+          </a:xfrm>
+          <a:prstGeom prst="rect">
+            <a:avLst/>
+          </a:prstGeom>
+          <a:noFill/>
+        </p:spPr>
+        <p:txBody>
+          <a:bodyPr wrap="square">
+            <a:spAutoFit/>
+          </a:bodyPr>
+          <a:lstStyle/>
+          <a:p>
+            <a:pPr algn="l"/>
+            <a:r>
+              <a:rPr sz="2800" b="1">
+                <a:solidFill>
+                  <a:srgbClr val="0B2545"/>
+                </a:solidFill>
+                <a:latin typeface="Segoe UI"/>
+              </a:rPr>
+              <a:t>Where each lever belongs</a:t>
+            </a:r>
+          </a:p>
+        </p:txBody>
+      </p:sp>
+      <p:graphicFrame>
+        <p:nvGraphicFramePr>
+          <p:cNvPr id="4" name="Table 3"/>
+          <p:cNvGraphicFramePr>
+            <a:graphicFrameLocks noGrp="1"/>
+          </p:cNvGraphicFramePr>
+          <p:nvPr/>
+        </p:nvGraphicFramePr>
+        <p:xfrm>
+          <a:off x="731520" y="1371600"/>
+          <a:ext cx="10728655" cy="1463040"/>
         </p:xfrm>
         <a:graphic>
           <a:graphicData uri="http://schemas.openxmlformats.org/drawingml/2006/table">
@@ -3496,7 +4403,7 @@
                           </a:solidFill>
                           <a:latin typeface="Segoe UI"/>
                         </a:rPr>
-                        <a:t>Plausible use</a:t>
+                        <a:t>Use</a:t>
                       </a:r>
                     </a:p>
                   </a:txBody>
@@ -3514,7 +4421,7 @@
                           </a:solidFill>
                           <a:latin typeface="Segoe UI"/>
                         </a:rPr>
-                        <a:t>The right lever</a:t>
+                        <a:t>Lever</a:t>
                       </a:r>
                     </a:p>
                   </a:txBody>
@@ -3532,7 +4439,7 @@
                           </a:solidFill>
                           <a:latin typeface="Segoe UI"/>
                         </a:rPr>
-                        <a:t>Non-negotiable control</a:t>
+                        <a:t>Control</a:t>
                       </a:r>
                     </a:p>
                   </a:txBody>
@@ -3570,7 +4477,7 @@
                           </a:solidFill>
                           <a:latin typeface="Segoe UI"/>
                         </a:rPr>
-                        <a:t>Classifying free-text survey answers; coding occupations</a:t>
+                        <a:t>Coding free-text answers</a:t>
                       </a:r>
                     </a:p>
                   </a:txBody>
@@ -3588,7 +4495,7 @@
                           </a:solidFill>
                           <a:latin typeface="Segoe UI"/>
                         </a:rPr>
-                        <a:t>Prompting, or a small trained classifier</a:t>
+                        <a:t>Prompt</a:t>
                       </a:r>
                     </a:p>
                   </a:txBody>
@@ -3606,7 +4513,7 @@
                           </a:solidFill>
                           <a:latin typeface="Segoe UI"/>
                         </a:rPr>
-                        <a:t>A labelled evaluation set — measured, not assumed</a:t>
+                        <a:t>A labelled evaluation set</a:t>
                       </a:r>
                     </a:p>
                   </a:txBody>
@@ -3644,7 +4551,7 @@
                           </a:solidFill>
                           <a:latin typeface="Segoe UI"/>
                         </a:rPr>
-                        <a:t>Extracting tables from a PDF publication</a:t>
+                        <a:t>Extracting tables from a PDF</a:t>
                       </a:r>
                     </a:p>
                   </a:txBody>
@@ -3662,7 +4569,7 @@
                           </a:solidFill>
                           <a:latin typeface="Segoe UI"/>
                         </a:rPr>
-                        <a:t>Prompting + structured output</a:t>
+                        <a:t>Prompt</a:t>
                       </a:r>
                     </a:p>
                   </a:txBody>
@@ -3680,81 +4587,7 @@
                           </a:solidFill>
                           <a:latin typeface="Segoe UI"/>
                         </a:rPr>
-                        <a:t>Verification against the source. Day 2 morning</a:t>
-                      </a:r>
-                    </a:p>
-                  </a:txBody>
-                  <a:tcPr/>
-                </a:tc>
-              </a:tr>
-              <a:tr h="292608">
-                <a:tc>
-                  <a:txBody>
-                    <a:bodyPr/>
-                    <a:lstStyle/>
-                    <a:p>
-                      <a:r>
-                        <a:rPr sz="1000" b="0">
-                          <a:solidFill>
-                            <a:srgbClr val="33403A"/>
-                          </a:solidFill>
-                          <a:latin typeface="Segoe UI"/>
-                        </a:rPr>
-                        <a:t>Analysis</a:t>
-                      </a:r>
-                    </a:p>
-                  </a:txBody>
-                  <a:tcPr/>
-                </a:tc>
-                <a:tc>
-                  <a:txBody>
-                    <a:bodyPr/>
-                    <a:lstStyle/>
-                    <a:p>
-                      <a:r>
-                        <a:rPr sz="1000" b="0">
-                          <a:solidFill>
-                            <a:srgbClr val="33403A"/>
-                          </a:solidFill>
-                          <a:latin typeface="Segoe UI"/>
-                        </a:rPr>
-                        <a:t>Writing and debugging the analysis code itself</a:t>
-                      </a:r>
-                    </a:p>
-                  </a:txBody>
-                  <a:tcPr/>
-                </a:tc>
-                <a:tc>
-                  <a:txBody>
-                    <a:bodyPr/>
-                    <a:lstStyle/>
-                    <a:p>
-                      <a:r>
-                        <a:rPr sz="1000" b="0">
-                          <a:solidFill>
-                            <a:srgbClr val="33403A"/>
-                          </a:solidFill>
-                          <a:latin typeface="Segoe UI"/>
-                        </a:rPr>
-                        <a:t>Prompting</a:t>
-                      </a:r>
-                    </a:p>
-                  </a:txBody>
-                  <a:tcPr/>
-                </a:tc>
-                <a:tc>
-                  <a:txBody>
-                    <a:bodyPr/>
-                    <a:lstStyle/>
-                    <a:p>
-                      <a:r>
-                        <a:rPr sz="1000" b="0">
-                          <a:solidFill>
-                            <a:srgbClr val="33403A"/>
-                          </a:solidFill>
-                          <a:latin typeface="Segoe UI"/>
-                        </a:rPr>
-                        <a:t>The code is read and run by a statistician</a:t>
+                        <a:t>Verification against the source</a:t>
                       </a:r>
                     </a:p>
                   </a:txBody>
@@ -3792,7 +4625,7 @@
                           </a:solidFill>
                           <a:latin typeface="Segoe UI"/>
                         </a:rPr>
-                        <a:t>Answering public questions about your publications</a:t>
+                        <a:t>Answering public questions</a:t>
                       </a:r>
                     </a:p>
                   </a:txBody>
@@ -3828,7 +4661,7 @@
                           </a:solidFill>
                           <a:latin typeface="Segoe UI"/>
                         </a:rPr>
-                        <a:t>Every answer carries its source passage</a:t>
+                        <a:t>Every answer cites its source</a:t>
                       </a:r>
                     </a:p>
                   </a:txBody>
@@ -3866,7 +4699,7 @@
                           </a:solidFill>
                           <a:latin typeface="Segoe UI"/>
                         </a:rPr>
-                        <a:t>Drafting methodological notes and metadata</a:t>
+                        <a:t>Drafting methodological notes</a:t>
                       </a:r>
                     </a:p>
                   </a:txBody>
@@ -3884,7 +4717,7 @@
                           </a:solidFill>
                           <a:latin typeface="Segoe UI"/>
                         </a:rPr>
-                        <a:t>Prompting, or RAG over past notes</a:t>
+                        <a:t>Prompt</a:t>
                       </a:r>
                     </a:p>
                   </a:txBody>
@@ -3909,77 +4742,13 @@
                   <a:tcPr/>
                 </a:tc>
               </a:tr>
-              <a:tr h="292608">
-                <a:tc>
-                  <a:txBody>
-                    <a:bodyPr/>
-                    <a:lstStyle/>
-                    <a:p>
-                      <a:r>
-                        <a:rPr sz="1000" b="0">
-                          <a:solidFill>
-                            <a:srgbClr val="33403A"/>
-                          </a:solidFill>
-                          <a:latin typeface="Segoe UI"/>
-                        </a:rPr>
-                        <a:t>Estimation</a:t>
-                      </a:r>
-                    </a:p>
-                  </a:txBody>
-                  <a:tcPr/>
-                </a:tc>
-                <a:tc>
-                  <a:txBody>
-                    <a:bodyPr/>
-                    <a:lstStyle/>
-                    <a:p>
-                      <a:r>
-                        <a:rPr sz="1000" b="0">
-                          <a:solidFill>
-                            <a:srgbClr val="33403A"/>
-                          </a:solidFill>
-                          <a:latin typeface="Segoe UI"/>
-                        </a:rPr>
-                        <a:t>Producing an official figure directly from a model.  Not on this list, and</a:t>
-                      </a:r>
-                    </a:p>
-                    <a:p>
-                      <a:r>
-                        <a:t>    not on any list. A language model outputs the plausible, not the measured. Use it around</a:t>
-                      </a:r>
-                    </a:p>
-                    <a:p>
-                      <a:r>
-                        <a:t>    your statistics, never in place of them.</a:t>
-                      </a:r>
-                    </a:p>
-                  </a:txBody>
-                  <a:tcPr/>
-                </a:tc>
-                <a:tc>
-                  <a:txBody>
-                    <a:bodyPr/>
-                    <a:lstStyle/>
-                    <a:p/>
-                  </a:txBody>
-                  <a:tcPr/>
-                </a:tc>
-                <a:tc>
-                  <a:txBody>
-                    <a:bodyPr/>
-                    <a:lstStyle/>
-                    <a:p/>
-                  </a:txBody>
-                  <a:tcPr/>
-                </a:tc>
-              </a:tr>
             </a:tbl>
           </a:graphicData>
         </a:graphic>
       </p:graphicFrame>
       <p:sp>
         <p:nvSpPr>
-          <p:cNvPr id="6" name="TextBox 5"/>
+          <p:cNvPr id="5" name="TextBox 4"/>
           <p:cNvSpPr txBox="1"/>
           <p:nvPr/>
         </p:nvSpPr>
@@ -4020,7 +4789,7 @@
 </p:sld>
 </file>
 
-<file path=ppt/slides/slide11.xml><?xml version="1.0" encoding="utf-8"?>
+<file path=ppt/slides/slide15.xml><?xml version="1.0" encoding="utf-8"?>
 <p:sld xmlns:a="http://schemas.openxmlformats.org/drawingml/2006/main" xmlns:p="http://schemas.openxmlformats.org/presentationml/2006/main" xmlns:r="http://schemas.openxmlformats.org/officeDocument/2006/relationships">
   <p:cSld>
     <p:spTree>
@@ -4082,7 +4851,7 @@
         <p:spPr>
           <a:xfrm>
             <a:off x="731520" y="502920"/>
-            <a:ext cx="10728655" cy="914400"/>
+            <a:ext cx="10728655" cy="320040"/>
           </a:xfrm>
           <a:prstGeom prst="rect">
             <a:avLst/>
@@ -4097,40 +4866,126 @@
           <a:p>
             <a:pPr algn="l"/>
             <a:r>
-              <a:rPr sz="2800" b="1">
-                <a:solidFill>
-                  <a:srgbClr val="0B2545"/>
+              <a:rPr sz="1100" b="1">
+                <a:solidFill>
+                  <a:srgbClr val="1B7A43"/>
                 </a:solidFill>
                 <a:latin typeface="Segoe UI"/>
               </a:rPr>
-              <a:t>Eight words, fixed for the week</a:t>
-            </a:r>
-          </a:p>
-        </p:txBody>
-      </p:sp>
-      <p:sp>
-        <p:nvSpPr>
-          <p:cNvPr id="4" name="Rectangle 3"/>
+              <a:t>THE LINE WE DO NOT CROSS</a:t>
+            </a:r>
+          </a:p>
+        </p:txBody>
+      </p:sp>
+      <p:sp>
+        <p:nvSpPr>
+          <p:cNvPr id="4" name="TextBox 3"/>
+          <p:cNvSpPr txBox="1"/>
+          <p:nvPr/>
+        </p:nvSpPr>
+        <p:spPr>
+          <a:xfrm>
+            <a:off x="731520" y="914400"/>
+            <a:ext cx="10728655" cy="548640"/>
+          </a:xfrm>
+          <a:prstGeom prst="rect">
+            <a:avLst/>
+          </a:prstGeom>
+          <a:noFill/>
+        </p:spPr>
+        <p:txBody>
+          <a:bodyPr wrap="square">
+            <a:spAutoFit/>
+          </a:bodyPr>
+          <a:lstStyle/>
+          <a:p>
+            <a:pPr algn="l"/>
+            <a:r>
+              <a:rPr sz="1400" b="0">
+                <a:solidFill>
+                  <a:srgbClr val="33403A"/>
+                </a:solidFill>
+                <a:latin typeface="Segoe UI"/>
+              </a:rPr>
+              <a:t>A language model outputs the plausible, not the measured. Use it
+ around  your statistics — never in place of them.</a:t>
+            </a:r>
+          </a:p>
+        </p:txBody>
+      </p:sp>
+      <p:sp>
+        <p:nvSpPr>
+          <p:cNvPr id="5" name="TextBox 4"/>
+          <p:cNvSpPr txBox="1"/>
+          <p:nvPr/>
+        </p:nvSpPr>
+        <p:spPr>
+          <a:xfrm>
+            <a:off x="731520" y="6400800"/>
+            <a:ext cx="10728655" cy="274320"/>
+          </a:xfrm>
+          <a:prstGeom prst="rect">
+            <a:avLst/>
+          </a:prstGeom>
+          <a:noFill/>
+        </p:spPr>
+        <p:txBody>
+          <a:bodyPr wrap="square">
+            <a:spAutoFit/>
+          </a:bodyPr>
+          <a:lstStyle/>
+          <a:p>
+            <a:pPr algn="l"/>
+            <a:r>
+              <a:rPr sz="900" b="0">
+                <a:solidFill>
+                  <a:srgbClr val="6B7B75"/>
+                </a:solidFill>
+                <a:latin typeface="Segoe UI"/>
+              </a:rPr>
+              <a:t>African Development Bank · AU STATAFRIC · STG17</a:t>
+            </a:r>
+          </a:p>
+        </p:txBody>
+      </p:sp>
+    </p:spTree>
+  </p:cSld>
+  <p:clrMapOvr>
+    <a:masterClrMapping/>
+  </p:clrMapOvr>
+</p:sld>
+</file>
+
+<file path=ppt/slides/slide16.xml><?xml version="1.0" encoding="utf-8"?>
+<p:sld xmlns:a="http://schemas.openxmlformats.org/drawingml/2006/main" xmlns:p="http://schemas.openxmlformats.org/presentationml/2006/main" xmlns:r="http://schemas.openxmlformats.org/officeDocument/2006/relationships">
+  <p:cSld>
+    <p:spTree>
+      <p:nvGrpSpPr>
+        <p:cNvPr id="1" name=""/>
+        <p:cNvGrpSpPr/>
+        <p:nvPr/>
+      </p:nvGrpSpPr>
+      <p:grpSpPr/>
+      <p:sp>
+        <p:nvSpPr>
+          <p:cNvPr id="2" name="Rectangle 1"/>
           <p:cNvSpPr/>
           <p:nvPr/>
         </p:nvSpPr>
         <p:spPr>
           <a:xfrm>
-            <a:off x="731520" y="1371600"/>
-            <a:ext cx="10728655" cy="960120"/>
+            <a:off x="0" y="0"/>
+            <a:ext cx="12191695" cy="60000"/>
           </a:xfrm>
           <a:prstGeom prst="rect">
             <a:avLst/>
           </a:prstGeom>
           <a:solidFill>
-            <a:srgbClr val="F4F8F5"/>
+            <a:srgbClr val="F2A900"/>
           </a:solidFill>
           <a:ln>
-            <a:solidFill>
-              <a:srgbClr val="1B7A43"/>
-            </a:solidFill>
+            <a:noFill/>
           </a:ln>
-          <a:effectLst/>
         </p:spPr>
         <p:style>
           <a:lnRef idx="1">
@@ -4147,206 +5002,51 @@
           </a:fontRef>
         </p:style>
         <p:txBody>
-          <a:bodyPr rtlCol="0" anchor="ctr" wrap="square"/>
+          <a:bodyPr rtlCol="0" anchor="ctr"/>
           <a:lstStyle/>
           <a:p>
             <a:pPr algn="ctr"/>
-            <a:r>
-              <a:rPr sz="1200">
-                <a:solidFill>
-                  <a:srgbClr val="33403A"/>
+          </a:p>
+        </p:txBody>
+      </p:sp>
+      <p:sp>
+        <p:nvSpPr>
+          <p:cNvPr id="3" name="TextBox 2"/>
+          <p:cNvSpPr txBox="1"/>
+          <p:nvPr/>
+        </p:nvSpPr>
+        <p:spPr>
+          <a:xfrm>
+            <a:off x="731520" y="502920"/>
+            <a:ext cx="10728655" cy="914400"/>
+          </a:xfrm>
+          <a:prstGeom prst="rect">
+            <a:avLst/>
+          </a:prstGeom>
+          <a:noFill/>
+        </p:spPr>
+        <p:txBody>
+          <a:bodyPr wrap="square">
+            <a:spAutoFit/>
+          </a:bodyPr>
+          <a:lstStyle/>
+          <a:p>
+            <a:pPr algn="l"/>
+            <a:r>
+              <a:rPr sz="2800" b="1">
+                <a:solidFill>
+                  <a:srgbClr val="0B2545"/>
                 </a:solidFill>
                 <a:latin typeface="Segoe UI"/>
               </a:rPr>
-              <a:t>THE DISCIPLINE THIS BUYS YOU — When someone in your office says "the agent will use RAG to fine-tune the
-answers", you now know that sentence contains three terms and describes no
-coherent system — and you can ask the question that unblocks the project:
- which of the three levers is this, and what are we measuring it against?</a:t>
-            </a:r>
-          </a:p>
-        </p:txBody>
-      </p:sp>
-      <p:graphicFrame>
-        <p:nvGraphicFramePr>
-          <p:cNvPr id="5" name="Table 4"/>
-          <p:cNvGraphicFramePr>
-            <a:graphicFrameLocks noGrp="1"/>
-          </p:cNvGraphicFramePr>
-          <p:nvPr/>
-        </p:nvGraphicFramePr>
-        <p:xfrm>
-          <a:off x="731520" y="2468880"/>
-          <a:ext cx="10728655" cy="1170432"/>
-        </p:xfrm>
-        <a:graphic>
-          <a:graphicData uri="http://schemas.openxmlformats.org/drawingml/2006/table">
-            <a:tbl>
-              <a:tblPr firstRow="1" bandRow="1">
-                <a:tableStyleId>{5C22544A-7EE6-4342-B048-85BDC9FD1C3A}</a:tableStyleId>
-              </a:tblPr>
-              <a:tblGrid>
-                <a:gridCol w="5364327"/>
-                <a:gridCol w="5364328"/>
-              </a:tblGrid>
-              <a:tr h="292608">
-                <a:tc>
-                  <a:txBody>
-                    <a:bodyPr/>
-                    <a:lstStyle/>
-                    <a:p>
-                      <a:r>
-                        <a:rPr sz="1000" b="1">
-                          <a:solidFill>
-                            <a:srgbClr val="FFFFFF"/>
-                          </a:solidFill>
-                          <a:latin typeface="Segoe UI"/>
-                        </a:rPr>
-                        <a:t>LLM</a:t>
-                      </a:r>
-                    </a:p>
-                  </a:txBody>
-                  <a:tcPr/>
-                </a:tc>
-                <a:tc>
-                  <a:txBody>
-                    <a:bodyPr/>
-                    <a:lstStyle/>
-                    <a:p>
-                      <a:r>
-                        <a:rPr sz="1000" b="1">
-                          <a:solidFill>
-                            <a:srgbClr val="FFFFFF"/>
-                          </a:solidFill>
-                          <a:latin typeface="Segoe UI"/>
-                        </a:rPr>
-                        <a:t>A next-token predictor trained on a very large text corpus. Not a database.</a:t>
-                      </a:r>
-                    </a:p>
-                  </a:txBody>
-                  <a:tcPr/>
-                </a:tc>
-              </a:tr>
-              <a:tr h="292608">
-                <a:tc>
-                  <a:txBody>
-                    <a:bodyPr/>
-                    <a:lstStyle/>
-                    <a:p>
-                      <a:r>
-                        <a:rPr sz="1000" b="0">
-                          <a:solidFill>
-                            <a:srgbClr val="33403A"/>
-                          </a:solidFill>
-                          <a:latin typeface="Segoe UI"/>
-                        </a:rPr>
-                        <a:t>Token</a:t>
-                      </a:r>
-                    </a:p>
-                  </a:txBody>
-                  <a:tcPr/>
-                </a:tc>
-                <a:tc>
-                  <a:txBody>
-                    <a:bodyPr/>
-                    <a:lstStyle/>
-                    <a:p>
-                      <a:r>
-                        <a:rPr sz="1000" b="0">
-                          <a:solidFill>
-                            <a:srgbClr val="33403A"/>
-                          </a:solidFill>
-                          <a:latin typeface="Segoe UI"/>
-                        </a:rPr>
-                        <a:t>The sub-word unit the model reads and writes. Cost and context limits are counted in these, not in words.</a:t>
-                      </a:r>
-                    </a:p>
-                  </a:txBody>
-                  <a:tcPr/>
-                </a:tc>
-              </a:tr>
-              <a:tr h="292608">
-                <a:tc>
-                  <a:txBody>
-                    <a:bodyPr/>
-                    <a:lstStyle/>
-                    <a:p>
-                      <a:r>
-                        <a:rPr sz="1000" b="0">
-                          <a:solidFill>
-                            <a:srgbClr val="33403A"/>
-                          </a:solidFill>
-                          <a:latin typeface="Segoe UI"/>
-                        </a:rPr>
-                        <a:t>Prompt engineering</a:t>
-                      </a:r>
-                    </a:p>
-                  </a:txBody>
-                  <a:tcPr/>
-                </a:tc>
-                <a:tc>
-                  <a:txBody>
-                    <a:bodyPr/>
-                    <a:lstStyle/>
-                    <a:p>
-                      <a:r>
-                        <a:rPr sz="1000" b="0">
-                          <a:solidFill>
-                            <a:srgbClr val="33403A"/>
-                          </a:solidFill>
-                          <a:latin typeface="Segoe UI"/>
-                        </a:rPr>
-                        <a:t>Shaping the  input . Free, instant, and the lever to exhaust first.</a:t>
-                      </a:r>
-                    </a:p>
-                  </a:txBody>
-                  <a:tcPr/>
-                </a:tc>
-              </a:tr>
-              <a:tr h="292608">
-                <a:tc>
-                  <a:txBody>
-                    <a:bodyPr/>
-                    <a:lstStyle/>
-                    <a:p>
-                      <a:r>
-                        <a:rPr sz="1000" b="0">
-                          <a:solidFill>
-                            <a:srgbClr val="33403A"/>
-                          </a:solidFill>
-                          <a:latin typeface="Segoe UI"/>
-                        </a:rPr>
-                        <a:t>RAG</a:t>
-                      </a:r>
-                    </a:p>
-                  </a:txBody>
-                  <a:tcPr/>
-                </a:tc>
-                <a:tc>
-                  <a:txBody>
-                    <a:bodyPr/>
-                    <a:lstStyle/>
-                    <a:p>
-                      <a:r>
-                        <a:rPr sz="1000" b="0">
-                          <a:solidFill>
-                            <a:srgbClr val="33403A"/>
-                          </a:solidFill>
-                          <a:latin typeface="Segoe UI"/>
-                        </a:rPr>
-                        <a:t>Shaping the  context  — retrieving your documents so the answer is grounded and citable.</a:t>
-                      </a:r>
-                    </a:p>
-                  </a:txBody>
-                  <a:tcPr/>
-                </a:tc>
-              </a:tr>
-            </a:tbl>
-          </a:graphicData>
-        </a:graphic>
-      </p:graphicFrame>
-      <p:sp>
-        <p:nvSpPr>
-          <p:cNvPr id="6" name="TextBox 5"/>
+              <a:t>The eight words</a:t>
+            </a:r>
+          </a:p>
+        </p:txBody>
+      </p:sp>
+      <p:sp>
+        <p:nvSpPr>
+          <p:cNvPr id="4" name="TextBox 3"/>
           <p:cNvSpPr txBox="1"/>
           <p:nvPr/>
         </p:nvSpPr>
@@ -4387,7 +5087,7 @@
 </p:sld>
 </file>
 
-<file path=ppt/slides/slide12.xml><?xml version="1.0" encoding="utf-8"?>
+<file path=ppt/slides/slide17.xml><?xml version="1.0" encoding="utf-8"?>
 <p:sld xmlns:a="http://schemas.openxmlformats.org/drawingml/2006/main" xmlns:p="http://schemas.openxmlformats.org/presentationml/2006/main" xmlns:r="http://schemas.openxmlformats.org/officeDocument/2006/relationships">
   <p:cSld>
     <p:spTree>
@@ -4541,8 +5241,7 @@
                 </a:solidFill>
                 <a:latin typeface="Segoe UI"/>
               </a:rPr>
-              <a:t>Eight minutes each, six slides, and the more useful half
-is what did not work.</a:t>
+              <a:t>Eight minutes each. Six slides. The more useful half is what did not work.</a:t>
             </a:r>
           </a:p>
         </p:txBody>
@@ -4577,9 +5276,10 @@
                 </a:solidFill>
                 <a:latin typeface="Segoe UI"/>
               </a:rPr>
-              <a:t>14:00 — AI Infrastructure: what it really takes to run this in a statistical office 
-14:45 — Laboratory: build the RAG assistant from this deck 
-15:45 — Laboratory: turn it into an agent, and find where it must stay supervised</a:t>
+              <a:t>14:00 · AI infrastructure — what it really takes 
+14:45 · Laboratory — build the RAG assistant 
+15:45 · Laboratory — turn it into an agent  
+Full reading list: workshop site → Resources → References</a:t>
             </a:r>
           </a:p>
         </p:txBody>
@@ -4627,344 +5327,7 @@
 </p:sld>
 </file>
 
-<file path=ppt/slides/slide13.xml><?xml version="1.0" encoding="utf-8"?>
-<p:sld xmlns:a="http://schemas.openxmlformats.org/drawingml/2006/main" xmlns:p="http://schemas.openxmlformats.org/presentationml/2006/main" xmlns:r="http://schemas.openxmlformats.org/officeDocument/2006/relationships">
-  <p:cSld>
-    <p:spTree>
-      <p:nvGrpSpPr>
-        <p:cNvPr id="1" name=""/>
-        <p:cNvGrpSpPr/>
-        <p:nvPr/>
-      </p:nvGrpSpPr>
-      <p:grpSpPr/>
-      <p:sp>
-        <p:nvSpPr>
-          <p:cNvPr id="2" name="Rectangle 1"/>
-          <p:cNvSpPr/>
-          <p:nvPr/>
-        </p:nvSpPr>
-        <p:spPr>
-          <a:xfrm>
-            <a:off x="0" y="0"/>
-            <a:ext cx="12191695" cy="60000"/>
-          </a:xfrm>
-          <a:prstGeom prst="rect">
-            <a:avLst/>
-          </a:prstGeom>
-          <a:solidFill>
-            <a:srgbClr val="F2A900"/>
-          </a:solidFill>
-          <a:ln>
-            <a:noFill/>
-          </a:ln>
-        </p:spPr>
-        <p:style>
-          <a:lnRef idx="1">
-            <a:schemeClr val="accent1"/>
-          </a:lnRef>
-          <a:fillRef idx="3">
-            <a:schemeClr val="accent1"/>
-          </a:fillRef>
-          <a:effectRef idx="2">
-            <a:schemeClr val="accent1"/>
-          </a:effectRef>
-          <a:fontRef idx="minor">
-            <a:schemeClr val="lt1"/>
-          </a:fontRef>
-        </p:style>
-        <p:txBody>
-          <a:bodyPr rtlCol="0" anchor="ctr"/>
-          <a:lstStyle/>
-          <a:p>
-            <a:pPr algn="ctr"/>
-          </a:p>
-        </p:txBody>
-      </p:sp>
-      <p:sp>
-        <p:nvSpPr>
-          <p:cNvPr id="3" name="TextBox 2"/>
-          <p:cNvSpPr txBox="1"/>
-          <p:nvPr/>
-        </p:nvSpPr>
-        <p:spPr>
-          <a:xfrm>
-            <a:off x="731520" y="502920"/>
-            <a:ext cx="10728655" cy="914400"/>
-          </a:xfrm>
-          <a:prstGeom prst="rect">
-            <a:avLst/>
-          </a:prstGeom>
-          <a:noFill/>
-        </p:spPr>
-        <p:txBody>
-          <a:bodyPr wrap="square">
-            <a:spAutoFit/>
-          </a:bodyPr>
-          <a:lstStyle/>
-          <a:p>
-            <a:pPr algn="l"/>
-            <a:r>
-              <a:rPr sz="2800" b="1">
-                <a:solidFill>
-                  <a:srgbClr val="0B2545"/>
-                </a:solidFill>
-                <a:latin typeface="Segoe UI"/>
-              </a:rPr>
-              <a:t>References</a:t>
-            </a:r>
-          </a:p>
-        </p:txBody>
-      </p:sp>
-      <p:sp>
-        <p:nvSpPr>
-          <p:cNvPr id="4" name="TextBox 3"/>
-          <p:cNvSpPr txBox="1"/>
-          <p:nvPr/>
-        </p:nvSpPr>
-        <p:spPr>
-          <a:xfrm>
-            <a:off x="731520" y="1371600"/>
-            <a:ext cx="10728655" cy="548640"/>
-          </a:xfrm>
-          <a:prstGeom prst="rect">
-            <a:avLst/>
-          </a:prstGeom>
-          <a:noFill/>
-        </p:spPr>
-        <p:txBody>
-          <a:bodyPr wrap="square">
-            <a:spAutoFit/>
-          </a:bodyPr>
-          <a:lstStyle/>
-          <a:p>
-            <a:pPr algn="l"/>
-            <a:r>
-              <a:rPr sz="1400" b="0">
-                <a:solidFill>
-                  <a:srgbClr val="33403A"/>
-                </a:solidFill>
-                <a:latin typeface="Segoe UI"/>
-              </a:rPr>
-              <a:t>The full annotated list, with live links, is on the workshop site under Resources.</a:t>
-            </a:r>
-          </a:p>
-        </p:txBody>
-      </p:sp>
-      <p:sp>
-        <p:nvSpPr>
-          <p:cNvPr id="5" name="TextBox 4"/>
-          <p:cNvSpPr txBox="1"/>
-          <p:nvPr/>
-        </p:nvSpPr>
-        <p:spPr>
-          <a:xfrm>
-            <a:off x="731520" y="1874520"/>
-            <a:ext cx="10728655" cy="3886200"/>
-          </a:xfrm>
-          <a:prstGeom prst="rect">
-            <a:avLst/>
-          </a:prstGeom>
-          <a:noFill/>
-        </p:spPr>
-        <p:txBody>
-          <a:bodyPr wrap="square">
-            <a:spAutoFit/>
-          </a:bodyPr>
-          <a:lstStyle/>
-          <a:p>
-            <a:pPr>
-              <a:spcAft>
-                <a:spcPts val="700"/>
-              </a:spcAft>
-            </a:pPr>
-            <a:r>
-              <a:rPr sz="1400">
-                <a:solidFill>
-                  <a:srgbClr val="33403A"/>
-                </a:solidFill>
-                <a:latin typeface="Segoe UI"/>
-              </a:rPr>
-              <a:t>•  Vaswani, A., Shazeer, N., Parmar, N., Uszkoreit, J., Jones, L., Gomez, A.N., et al. 
-(2017). Attention Is All You Need.  Advances in Neural Information Processing
-Systems  30.  The transformer architecture every model in this deck is built on.</a:t>
-            </a:r>
-          </a:p>
-          <a:p>
-            <a:pPr>
-              <a:spcAft>
-                <a:spcPts val="700"/>
-              </a:spcAft>
-            </a:pPr>
-            <a:r>
-              <a:rPr sz="1400">
-                <a:solidFill>
-                  <a:srgbClr val="33403A"/>
-                </a:solidFill>
-                <a:latin typeface="Segoe UI"/>
-              </a:rPr>
-              <a:t>•  Brown, T.B., et al.  (2020). Language Models are Few-Shot Learners.
- Advances in Neural Information Processing Systems  33. 
- Why giving a model a couple of examples in the prompt works at all.</a:t>
-            </a:r>
-          </a:p>
-          <a:p>
-            <a:pPr>
-              <a:spcAft>
-                <a:spcPts val="700"/>
-              </a:spcAft>
-            </a:pPr>
-            <a:r>
-              <a:rPr sz="1400">
-                <a:solidFill>
-                  <a:srgbClr val="33403A"/>
-                </a:solidFill>
-                <a:latin typeface="Segoe UI"/>
-              </a:rPr>
-              <a:t>•  Lewis, P., Perez, E., Piktus, A., Petroni, F., Karpukhin, V., Goyal, N., et al. 
-(2020). Retrieval-Augmented Generation for Knowledge-Intensive NLP Tasks.
- Advances in Neural Information Processing Systems  33. 
- The original RAG paper — the pattern you build this afternoon.</a:t>
-            </a:r>
-          </a:p>
-          <a:p>
-            <a:pPr>
-              <a:spcAft>
-                <a:spcPts val="700"/>
-              </a:spcAft>
-            </a:pPr>
-            <a:r>
-              <a:rPr sz="1400">
-                <a:solidFill>
-                  <a:srgbClr val="33403A"/>
-                </a:solidFill>
-                <a:latin typeface="Segoe UI"/>
-              </a:rPr>
-              <a:t>•  Hu, E.J., Shen, Y., Wallis, P., Allen-Zhu, Z., Li, Y., Wang, S., et al.  (2021).
-LoRA: Low-Rank Adaptation of Large Language Models.  arXiv:2106.09685 ;
-ICLR 2022.  Why fine-tuning is now affordable — and still the wrong first lever.</a:t>
-            </a:r>
-          </a:p>
-          <a:p>
-            <a:pPr>
-              <a:spcAft>
-                <a:spcPts val="700"/>
-              </a:spcAft>
-            </a:pPr>
-            <a:r>
-              <a:rPr sz="1400">
-                <a:solidFill>
-                  <a:srgbClr val="33403A"/>
-                </a:solidFill>
-                <a:latin typeface="Segoe UI"/>
-              </a:rPr>
-              <a:t>•  Wei, J., Wang, X., Schuurmans, D., Bosma, M., Ichter, B., Xia, F., et al.  (2022).
-Chain-of-Thought Prompting Elicits Reasoning in Large Language Models.
- Advances in Neural Information Processing Systems  35. 
- The prompting result behind much of Day 2 morning.</a:t>
-            </a:r>
-          </a:p>
-          <a:p>
-            <a:pPr>
-              <a:spcAft>
-                <a:spcPts val="700"/>
-              </a:spcAft>
-            </a:pPr>
-            <a:r>
-              <a:rPr sz="1400">
-                <a:solidFill>
-                  <a:srgbClr val="33403A"/>
-                </a:solidFill>
-                <a:latin typeface="Segoe UI"/>
-              </a:rPr>
-              <a:t>•  Ji, Z., Lee, N., Frieske, R., Yu, T., Su, D., Xu, Y., et al.  (2023).
-Survey of Hallucination in Natural Language Generation.  ACM Computing Surveys ,
-55(12), 1–38.  Hallucination as a property of the mechanism, not a defect to patch.</a:t>
-            </a:r>
-          </a:p>
-          <a:p>
-            <a:pPr>
-              <a:spcAft>
-                <a:spcPts val="700"/>
-              </a:spcAft>
-            </a:pPr>
-            <a:r>
-              <a:rPr sz="1400">
-                <a:solidFill>
-                  <a:srgbClr val="33403A"/>
-                </a:solidFill>
-                <a:latin typeface="Segoe UI"/>
-              </a:rPr>
-              <a:t>•  UNECE High-Level Group for the Modernisation of Official Statistics. 
- Machine Learning for Official Statistics  — machine learning project outputs,
-including ethical-use guidance and a quality framework.
- statswiki.unece.org  
- The international methodological frame. Cite it rather than inventing your own criteria.</a:t>
-            </a:r>
-          </a:p>
-          <a:p>
-            <a:pPr>
-              <a:spcAft>
-                <a:spcPts val="700"/>
-              </a:spcAft>
-            </a:pPr>
-            <a:r>
-              <a:rPr sz="1400">
-                <a:solidFill>
-                  <a:srgbClr val="33403A"/>
-                </a:solidFill>
-                <a:latin typeface="Segoe UI"/>
-              </a:rPr>
-              <a:t>•  Model Context Protocol.  Open specification for connecting models to tools
-and data sources.  modelcontextprotocol.io  
- Write a tool once; reuse it across systems instead of per vendor.</a:t>
-            </a:r>
-          </a:p>
-        </p:txBody>
-      </p:sp>
-      <p:sp>
-        <p:nvSpPr>
-          <p:cNvPr id="6" name="TextBox 5"/>
-          <p:cNvSpPr txBox="1"/>
-          <p:nvPr/>
-        </p:nvSpPr>
-        <p:spPr>
-          <a:xfrm>
-            <a:off x="731520" y="6400800"/>
-            <a:ext cx="10728655" cy="274320"/>
-          </a:xfrm>
-          <a:prstGeom prst="rect">
-            <a:avLst/>
-          </a:prstGeom>
-          <a:noFill/>
-        </p:spPr>
-        <p:txBody>
-          <a:bodyPr wrap="square">
-            <a:spAutoFit/>
-          </a:bodyPr>
-          <a:lstStyle/>
-          <a:p>
-            <a:pPr algn="l"/>
-            <a:r>
-              <a:rPr sz="900" b="0">
-                <a:solidFill>
-                  <a:srgbClr val="6B7B75"/>
-                </a:solidFill>
-                <a:latin typeface="Segoe UI"/>
-              </a:rPr>
-              <a:t>African Development Bank · AU STATAFRIC · STG17</a:t>
-            </a:r>
-          </a:p>
-        </p:txBody>
-      </p:sp>
-    </p:spTree>
-  </p:cSld>
-  <p:clrMapOvr>
-    <a:masterClrMapping/>
-  </p:clrMapOvr>
-</p:sld>
-</file>
-
-<file path=ppt/slides/slide14.xml><?xml version="1.0" encoding="utf-8"?>
+<file path=ppt/slides/slide18.xml><?xml version="1.0" encoding="utf-8"?>
 <p:sld xmlns:a="http://schemas.openxmlformats.org/drawingml/2006/main" xmlns:p="http://schemas.openxmlformats.org/presentationml/2006/main" xmlns:r="http://schemas.openxmlformats.org/officeDocument/2006/relationships">
   <p:cSld>
     <p:spTree>
@@ -5126,7 +5489,7 @@
         <p:spPr>
           <a:xfrm>
             <a:off x="731520" y="502920"/>
-            <a:ext cx="10728655" cy="914400"/>
+            <a:ext cx="10728655" cy="320040"/>
           </a:xfrm>
           <a:prstGeom prst="rect">
             <a:avLst/>
@@ -5141,13 +5504,13 @@
           <a:p>
             <a:pPr algn="l"/>
             <a:r>
-              <a:rPr sz="2800" b="1">
-                <a:solidFill>
-                  <a:srgbClr val="0B2545"/>
+              <a:rPr sz="1100" b="1">
+                <a:solidFill>
+                  <a:srgbClr val="1B7A43"/>
                 </a:solidFill>
                 <a:latin typeface="Segoe UI"/>
               </a:rPr>
-              <a:t>Why half an hour on vocabulary</a:t>
+              <a:t>WHERE WE ARE STARTING FROM</a:t>
             </a:r>
           </a:p>
         </p:txBody>
@@ -5160,8 +5523,8 @@
         </p:nvSpPr>
         <p:spPr>
           <a:xfrm>
-            <a:off x="731520" y="1371600"/>
-            <a:ext cx="10728655" cy="548640"/>
+            <a:off x="731520" y="914400"/>
+            <a:ext cx="10728655" cy="914400"/>
           </a:xfrm>
           <a:prstGeom prst="rect">
             <a:avLst/>
@@ -5176,14 +5539,13 @@
           <a:p>
             <a:pPr algn="l"/>
             <a:r>
-              <a:rPr sz="1400" b="0">
-                <a:solidFill>
-                  <a:srgbClr val="33403A"/>
+              <a:rPr sz="2800" b="1">
+                <a:solidFill>
+                  <a:srgbClr val="0B2545"/>
                 </a:solidFill>
                 <a:latin typeface="Segoe UI"/>
               </a:rPr>
-              <a:t>Three sentences, all of which have appeared in real terms of reference at real
-statistical offices:</a:t>
+              <a:t>Three sentences from real terms of reference</a:t>
             </a:r>
           </a:p>
         </p:txBody>
@@ -5191,193 +5553,6 @@
       <p:sp>
         <p:nvSpPr>
           <p:cNvPr id="5" name="TextBox 4"/>
-          <p:cNvSpPr txBox="1"/>
-          <p:nvPr/>
-        </p:nvSpPr>
-        <p:spPr>
-          <a:xfrm>
-            <a:off x="731520" y="1874520"/>
-            <a:ext cx="10728655" cy="548640"/>
-          </a:xfrm>
-          <a:prstGeom prst="rect">
-            <a:avLst/>
-          </a:prstGeom>
-          <a:noFill/>
-        </p:spPr>
-        <p:txBody>
-          <a:bodyPr wrap="square">
-            <a:spAutoFit/>
-          </a:bodyPr>
-          <a:lstStyle/>
-          <a:p>
-            <a:pPr algn="l"/>
-            <a:r>
-              <a:rPr sz="1400" b="0">
-                <a:solidFill>
-                  <a:srgbClr val="33403A"/>
-                </a:solidFill>
-                <a:latin typeface="Segoe UI"/>
-              </a:rPr>
-              <a:t>Each describes a  different  system, with different
-cost, different risk, and a different answer to "who is accountable for the
-output". The third one, in particular, usually describes something the author
-did not intend and would not have funded.</a:t>
-            </a:r>
-          </a:p>
-        </p:txBody>
-      </p:sp>
-      <p:sp>
-        <p:nvSpPr>
-          <p:cNvPr id="6" name="TextBox 5"/>
-          <p:cNvSpPr txBox="1"/>
-          <p:nvPr/>
-        </p:nvSpPr>
-        <p:spPr>
-          <a:xfrm>
-            <a:off x="731520" y="2377440"/>
-            <a:ext cx="10728655" cy="457200"/>
-          </a:xfrm>
-          <a:prstGeom prst="rect">
-            <a:avLst/>
-          </a:prstGeom>
-          <a:noFill/>
-        </p:spPr>
-        <p:txBody>
-          <a:bodyPr wrap="square">
-            <a:spAutoFit/>
-          </a:bodyPr>
-          <a:lstStyle/>
-          <a:p>
-            <a:pPr algn="l"/>
-            <a:r>
-              <a:rPr sz="1500" b="1">
-                <a:solidFill>
-                  <a:srgbClr val="1B7A43"/>
-                </a:solidFill>
-                <a:latin typeface="Segoe UI"/>
-              </a:rPr>
-              <a:t>8  Terms fixed today</a:t>
-            </a:r>
-          </a:p>
-        </p:txBody>
-      </p:sp>
-      <p:sp>
-        <p:nvSpPr>
-          <p:cNvPr id="7" name="Rectangle 6"/>
-          <p:cNvSpPr/>
-          <p:nvPr/>
-        </p:nvSpPr>
-        <p:spPr>
-          <a:xfrm>
-            <a:off x="731520" y="2926080"/>
-            <a:ext cx="10728655" cy="960120"/>
-          </a:xfrm>
-          <a:prstGeom prst="rect">
-            <a:avLst/>
-          </a:prstGeom>
-          <a:solidFill>
-            <a:srgbClr val="F4F8F5"/>
-          </a:solidFill>
-          <a:ln>
-            <a:solidFill>
-              <a:srgbClr val="1B7A43"/>
-            </a:solidFill>
-          </a:ln>
-          <a:effectLst/>
-        </p:spPr>
-        <p:style>
-          <a:lnRef idx="1">
-            <a:schemeClr val="accent1"/>
-          </a:lnRef>
-          <a:fillRef idx="3">
-            <a:schemeClr val="accent1"/>
-          </a:fillRef>
-          <a:effectRef idx="2">
-            <a:schemeClr val="accent1"/>
-          </a:effectRef>
-          <a:fontRef idx="minor">
-            <a:schemeClr val="lt1"/>
-          </a:fontRef>
-        </p:style>
-        <p:txBody>
-          <a:bodyPr rtlCol="0" anchor="ctr" wrap="square"/>
-          <a:lstStyle/>
-          <a:p>
-            <a:pPr algn="ctr"/>
-            <a:r>
-              <a:rPr sz="1200">
-                <a:solidFill>
-                  <a:srgbClr val="33403A"/>
-                </a:solidFill>
-                <a:latin typeface="Segoe UI"/>
-              </a:rPr>
-              <a:t>SEEN IN THE WILD — "We need an AI to answer questions about our publications."  
- "The agent will use machine learning to classify the responses."  
- "We will fine-tune the model on our data so it knows our statistics."</a:t>
-            </a:r>
-          </a:p>
-        </p:txBody>
-      </p:sp>
-      <p:sp>
-        <p:nvSpPr>
-          <p:cNvPr id="8" name="Rectangle 7"/>
-          <p:cNvSpPr/>
-          <p:nvPr/>
-        </p:nvSpPr>
-        <p:spPr>
-          <a:xfrm>
-            <a:off x="731520" y="4023360"/>
-            <a:ext cx="10728655" cy="960120"/>
-          </a:xfrm>
-          <a:prstGeom prst="rect">
-            <a:avLst/>
-          </a:prstGeom>
-          <a:solidFill>
-            <a:srgbClr val="F4F8F5"/>
-          </a:solidFill>
-          <a:ln>
-            <a:solidFill>
-              <a:srgbClr val="1B7A43"/>
-            </a:solidFill>
-          </a:ln>
-          <a:effectLst/>
-        </p:spPr>
-        <p:style>
-          <a:lnRef idx="1">
-            <a:schemeClr val="accent1"/>
-          </a:lnRef>
-          <a:fillRef idx="3">
-            <a:schemeClr val="accent1"/>
-          </a:fillRef>
-          <a:effectRef idx="2">
-            <a:schemeClr val="accent1"/>
-          </a:effectRef>
-          <a:fontRef idx="minor">
-            <a:schemeClr val="lt1"/>
-          </a:fontRef>
-        </p:style>
-        <p:txBody>
-          <a:bodyPr rtlCol="0" anchor="ctr" wrap="square"/>
-          <a:lstStyle/>
-          <a:p>
-            <a:pPr algn="ctr"/>
-            <a:r>
-              <a:rPr sz="1200">
-                <a:solidFill>
-                  <a:srgbClr val="33403A"/>
-                </a:solidFill>
-                <a:latin typeface="Segoe UI"/>
-              </a:rPr>
-              <a:t>THE POINT OF THIS HALF-HOUR — Not to make you an engineer. To make sure that when your office writes a
-specification, procures a service, or explains a decision to a Board, the words
-in the document mean what the reader thinks they mean.</a:t>
-            </a:r>
-          </a:p>
-        </p:txBody>
-      </p:sp>
-      <p:sp>
-        <p:nvSpPr>
-          <p:cNvPr id="9" name="TextBox 8"/>
           <p:cNvSpPr txBox="1"/>
           <p:nvPr/>
         </p:nvSpPr>
@@ -5437,18 +5612,17 @@
         <p:spPr>
           <a:xfrm>
             <a:off x="0" y="0"/>
-            <a:ext cx="12191695" cy="6858000"/>
+            <a:ext cx="12191695" cy="60000"/>
           </a:xfrm>
           <a:prstGeom prst="rect">
             <a:avLst/>
           </a:prstGeom>
           <a:solidFill>
-            <a:srgbClr val="0B2545"/>
+            <a:srgbClr val="F2A900"/>
           </a:solidFill>
           <a:ln>
             <a:noFill/>
           </a:ln>
-          <a:effectLst/>
         </p:spPr>
         <p:style>
           <a:lnRef idx="1">
@@ -5481,7 +5655,7 @@
         <p:spPr>
           <a:xfrm>
             <a:off x="731520" y="502920"/>
-            <a:ext cx="10728655" cy="320040"/>
+            <a:ext cx="10728655" cy="914400"/>
           </a:xfrm>
           <a:prstGeom prst="rect">
             <a:avLst/>
@@ -5496,13 +5670,13 @@
           <a:p>
             <a:pPr algn="l"/>
             <a:r>
-              <a:rPr sz="1100" b="1">
-                <a:solidFill>
-                  <a:srgbClr val="F2A900"/>
+              <a:rPr sz="2800" b="1">
+                <a:solidFill>
+                  <a:srgbClr val="0B2545"/>
                 </a:solidFill>
                 <a:latin typeface="Segoe UI"/>
               </a:rPr>
-              <a:t>PART 1</a:t>
+              <a:t>Each describes a different system</a:t>
             </a:r>
           </a:p>
         </p:txBody>
@@ -5515,8 +5689,8 @@
         </p:nvSpPr>
         <p:spPr>
           <a:xfrm>
-            <a:off x="731520" y="914400"/>
-            <a:ext cx="10728655" cy="914400"/>
+            <a:off x="731520" y="1371600"/>
+            <a:ext cx="10728655" cy="457200"/>
           </a:xfrm>
           <a:prstGeom prst="rect">
             <a:avLst/>
@@ -5531,48 +5705,69 @@
           <a:p>
             <a:pPr algn="l"/>
             <a:r>
-              <a:rPr sz="2800" b="1">
-                <a:solidFill>
-                  <a:srgbClr val="FFFFFF"/>
+              <a:rPr sz="1500" b="1">
+                <a:solidFill>
+                  <a:srgbClr val="1B7A43"/>
                 </a:solidFill>
                 <a:latin typeface="Segoe UI"/>
               </a:rPr>
-              <a:t>The one mechanism underneath</a:t>
-            </a:r>
-          </a:p>
-        </p:txBody>
-      </p:sp>
-      <p:sp>
-        <p:nvSpPr>
-          <p:cNvPr id="5" name="TextBox 4"/>
-          <p:cNvSpPr txBox="1"/>
-          <p:nvPr/>
-        </p:nvSpPr>
-        <p:spPr>
-          <a:xfrm>
-            <a:off x="731520" y="1783080"/>
-            <a:ext cx="10728655" cy="548640"/>
-          </a:xfrm>
-          <a:prstGeom prst="rect">
-            <a:avLst/>
-          </a:prstGeom>
-          <a:noFill/>
-        </p:spPr>
-        <p:txBody>
-          <a:bodyPr wrap="square">
-            <a:spAutoFit/>
-          </a:bodyPr>
-          <a:lstStyle/>
-          <a:p>
-            <a:pPr algn="l"/>
-            <a:r>
-              <a:rPr sz="1400" b="0">
-                <a:solidFill>
-                  <a:srgbClr val="DBE7E0"/>
+              <a:t>≠  Cost</a:t>
+            </a:r>
+          </a:p>
+        </p:txBody>
+      </p:sp>
+      <p:sp>
+        <p:nvSpPr>
+          <p:cNvPr id="5" name="Rectangle 4"/>
+          <p:cNvSpPr/>
+          <p:nvPr/>
+        </p:nvSpPr>
+        <p:spPr>
+          <a:xfrm>
+            <a:off x="731520" y="1920240"/>
+            <a:ext cx="10728655" cy="960120"/>
+          </a:xfrm>
+          <a:prstGeom prst="rect">
+            <a:avLst/>
+          </a:prstGeom>
+          <a:solidFill>
+            <a:srgbClr val="F4F8F5"/>
+          </a:solidFill>
+          <a:ln>
+            <a:solidFill>
+              <a:srgbClr val="1B7A43"/>
+            </a:solidFill>
+          </a:ln>
+          <a:effectLst/>
+        </p:spPr>
+        <p:style>
+          <a:lnRef idx="1">
+            <a:schemeClr val="accent1"/>
+          </a:lnRef>
+          <a:fillRef idx="3">
+            <a:schemeClr val="accent1"/>
+          </a:fillRef>
+          <a:effectRef idx="2">
+            <a:schemeClr val="accent1"/>
+          </a:effectRef>
+          <a:fontRef idx="minor">
+            <a:schemeClr val="lt1"/>
+          </a:fontRef>
+        </p:style>
+        <p:txBody>
+          <a:bodyPr rtlCol="0" anchor="ctr" wrap="square"/>
+          <a:lstStyle/>
+          <a:p>
+            <a:pPr algn="ctr"/>
+            <a:r>
+              <a:rPr sz="1200">
+                <a:solidFill>
+                  <a:srgbClr val="33403A"/>
                 </a:solidFill>
                 <a:latin typeface="Segoe UI"/>
               </a:rPr>
-              <a:t>Everything else in this deck is built on a single loop.</a:t>
+              <a:t>WHAT THIS HALF-HOUR BUYS — Not engineering skill. The ability to read a proposal and know which of three
+very different systems it actually describes.</a:t>
             </a:r>
           </a:p>
         </p:txBody>
@@ -5639,17 +5834,18 @@
         <p:spPr>
           <a:xfrm>
             <a:off x="0" y="0"/>
-            <a:ext cx="12191695" cy="60000"/>
+            <a:ext cx="12191695" cy="6858000"/>
           </a:xfrm>
           <a:prstGeom prst="rect">
             <a:avLst/>
           </a:prstGeom>
           <a:solidFill>
-            <a:srgbClr val="F2A900"/>
+            <a:srgbClr val="0B2545"/>
           </a:solidFill>
           <a:ln>
             <a:noFill/>
           </a:ln>
+          <a:effectLst/>
         </p:spPr>
         <p:style>
           <a:lnRef idx="1">
@@ -5682,7 +5878,7 @@
         <p:spPr>
           <a:xfrm>
             <a:off x="731520" y="502920"/>
-            <a:ext cx="10728655" cy="914400"/>
+            <a:ext cx="10728655" cy="320040"/>
           </a:xfrm>
           <a:prstGeom prst="rect">
             <a:avLst/>
@@ -5697,85 +5893,27 @@
           <a:p>
             <a:pPr algn="l"/>
             <a:r>
-              <a:rPr sz="2800" b="1">
-                <a:solidFill>
-                  <a:srgbClr val="0B2545"/>
+              <a:rPr sz="1100" b="1">
+                <a:solidFill>
+                  <a:srgbClr val="F2A900"/>
                 </a:solidFill>
                 <a:latin typeface="Segoe UI"/>
               </a:rPr>
-              <a:t>What a language model actually does</a:t>
-            </a:r>
-          </a:p>
-        </p:txBody>
-      </p:sp>
-      <p:sp>
-        <p:nvSpPr>
-          <p:cNvPr id="4" name="Rectangle 3"/>
-          <p:cNvSpPr/>
-          <p:nvPr/>
-        </p:nvSpPr>
-        <p:spPr>
-          <a:xfrm>
-            <a:off x="731520" y="1371600"/>
-            <a:ext cx="10728655" cy="960120"/>
-          </a:xfrm>
-          <a:prstGeom prst="rect">
-            <a:avLst/>
-          </a:prstGeom>
-          <a:solidFill>
-            <a:srgbClr val="F4F8F5"/>
-          </a:solidFill>
-          <a:ln>
-            <a:solidFill>
-              <a:srgbClr val="1B7A43"/>
-            </a:solidFill>
-          </a:ln>
-          <a:effectLst/>
-        </p:spPr>
-        <p:style>
-          <a:lnRef idx="1">
-            <a:schemeClr val="accent1"/>
-          </a:lnRef>
-          <a:fillRef idx="3">
-            <a:schemeClr val="accent1"/>
-          </a:fillRef>
-          <a:effectRef idx="2">
-            <a:schemeClr val="accent1"/>
-          </a:effectRef>
-          <a:fontRef idx="minor">
-            <a:schemeClr val="lt1"/>
-          </a:fontRef>
-        </p:style>
-        <p:txBody>
-          <a:bodyPr rtlCol="0" anchor="ctr" wrap="square"/>
-          <a:lstStyle/>
-          <a:p>
-            <a:pPr algn="ctr"/>
-            <a:r>
-              <a:rPr sz="1200">
-                <a:solidFill>
-                  <a:srgbClr val="33403A"/>
-                </a:solidFill>
-                <a:latin typeface="Segoe UI"/>
-              </a:rPr>
-              <a:t>READ THAT LAST LINE TWICE — A language model is not a knowledge base with a conversational front end. It is a
-next-token predictor. It produces the  most plausible continuation , and
-plausibility and truth agree most of the time — which is exactly what makes the
-disagreements dangerous.</a:t>
-            </a:r>
-          </a:p>
-        </p:txBody>
-      </p:sp>
-      <p:sp>
-        <p:nvSpPr>
-          <p:cNvPr id="5" name="TextBox 4"/>
+              <a:t>PART 1 OF 3</a:t>
+            </a:r>
+          </a:p>
+        </p:txBody>
+      </p:sp>
+      <p:sp>
+        <p:nvSpPr>
+          <p:cNvPr id="4" name="TextBox 3"/>
           <p:cNvSpPr txBox="1"/>
           <p:nvPr/>
         </p:nvSpPr>
         <p:spPr>
           <a:xfrm>
-            <a:off x="731520" y="2468880"/>
-            <a:ext cx="10728655" cy="640080"/>
+            <a:off x="731520" y="914400"/>
+            <a:ext cx="10728655" cy="914400"/>
           </a:xfrm>
           <a:prstGeom prst="rect">
             <a:avLst/>
@@ -5790,13 +5928,48 @@
           <a:p>
             <a:pPr algn="l"/>
             <a:r>
-              <a:rPr sz="1100" b="0">
-                <a:solidFill>
-                  <a:srgbClr val="6B7B75"/>
+              <a:rPr sz="2800" b="1">
+                <a:solidFill>
+                  <a:srgbClr val="FFFFFF"/>
                 </a:solidFill>
                 <a:latin typeface="Segoe UI"/>
               </a:rPr>
-              <a:t>FIGURE — screenshot slide 4 of the HTML deck and paste it here.</a:t>
+              <a:t>The one mechanism underneath</a:t>
+            </a:r>
+          </a:p>
+        </p:txBody>
+      </p:sp>
+      <p:sp>
+        <p:nvSpPr>
+          <p:cNvPr id="5" name="TextBox 4"/>
+          <p:cNvSpPr txBox="1"/>
+          <p:nvPr/>
+        </p:nvSpPr>
+        <p:spPr>
+          <a:xfrm>
+            <a:off x="731520" y="1783080"/>
+            <a:ext cx="10728655" cy="548640"/>
+          </a:xfrm>
+          <a:prstGeom prst="rect">
+            <a:avLst/>
+          </a:prstGeom>
+          <a:noFill/>
+        </p:spPr>
+        <p:txBody>
+          <a:bodyPr wrap="square">
+            <a:spAutoFit/>
+          </a:bodyPr>
+          <a:lstStyle/>
+          <a:p>
+            <a:pPr algn="l"/>
+            <a:r>
+              <a:rPr sz="1400" b="0">
+                <a:solidFill>
+                  <a:srgbClr val="DBE7E0"/>
+                </a:solidFill>
+                <a:latin typeface="Segoe UI"/>
+              </a:rPr>
+              <a:t>Everything else today is built on a single loop.</a:t>
             </a:r>
           </a:p>
         </p:txBody>
@@ -5863,18 +6036,17 @@
         <p:spPr>
           <a:xfrm>
             <a:off x="0" y="0"/>
-            <a:ext cx="12191695" cy="6858000"/>
+            <a:ext cx="12191695" cy="60000"/>
           </a:xfrm>
           <a:prstGeom prst="rect">
             <a:avLst/>
           </a:prstGeom>
           <a:solidFill>
-            <a:srgbClr val="0B2545"/>
+            <a:srgbClr val="F2A900"/>
           </a:solidFill>
           <a:ln>
             <a:noFill/>
           </a:ln>
-          <a:effectLst/>
         </p:spPr>
         <p:style>
           <a:lnRef idx="1">
@@ -5907,7 +6079,7 @@
         <p:spPr>
           <a:xfrm>
             <a:off x="731520" y="502920"/>
-            <a:ext cx="10728655" cy="320040"/>
+            <a:ext cx="10728655" cy="914400"/>
           </a:xfrm>
           <a:prstGeom prst="rect">
             <a:avLst/>
@@ -5922,13 +6094,13 @@
           <a:p>
             <a:pPr algn="l"/>
             <a:r>
-              <a:rPr sz="1100" b="1">
-                <a:solidFill>
-                  <a:srgbClr val="F2A900"/>
+              <a:rPr sz="2800" b="1">
+                <a:solidFill>
+                  <a:srgbClr val="0B2545"/>
                 </a:solidFill>
                 <a:latin typeface="Segoe UI"/>
               </a:rPr>
-              <a:t>PART 2</a:t>
+              <a:t>What a language model actually does</a:t>
             </a:r>
           </a:p>
         </p:txBody>
@@ -5941,8 +6113,8 @@
         </p:nvSpPr>
         <p:spPr>
           <a:xfrm>
-            <a:off x="731520" y="914400"/>
-            <a:ext cx="10728655" cy="914400"/>
+            <a:off x="731520" y="1371600"/>
+            <a:ext cx="10728655" cy="640080"/>
           </a:xfrm>
           <a:prstGeom prst="rect">
             <a:avLst/>
@@ -5957,13 +6129,13 @@
           <a:p>
             <a:pPr algn="l"/>
             <a:r>
-              <a:rPr sz="2800" b="1">
-                <a:solidFill>
-                  <a:srgbClr val="FFFFFF"/>
+              <a:rPr sz="1100" b="0">
+                <a:solidFill>
+                  <a:srgbClr val="6B7B75"/>
                 </a:solidFill>
                 <a:latin typeface="Segoe UI"/>
               </a:rPr>
-              <a:t>Three ways to make it useful</a:t>
+              <a:t>FIGURE — screenshot slide 5 of the HTML deck and paste it here.</a:t>
             </a:r>
           </a:p>
         </p:txBody>
@@ -5971,41 +6143,6 @@
       <p:sp>
         <p:nvSpPr>
           <p:cNvPr id="5" name="TextBox 4"/>
-          <p:cNvSpPr txBox="1"/>
-          <p:nvPr/>
-        </p:nvSpPr>
-        <p:spPr>
-          <a:xfrm>
-            <a:off x="731520" y="1783080"/>
-            <a:ext cx="10728655" cy="548640"/>
-          </a:xfrm>
-          <a:prstGeom prst="rect">
-            <a:avLst/>
-          </a:prstGeom>
-          <a:noFill/>
-        </p:spPr>
-        <p:txBody>
-          <a:bodyPr wrap="square">
-            <a:spAutoFit/>
-          </a:bodyPr>
-          <a:lstStyle/>
-          <a:p>
-            <a:pPr algn="l"/>
-            <a:r>
-              <a:rPr sz="1400" b="0">
-                <a:solidFill>
-                  <a:srgbClr val="DBE7E0"/>
-                </a:solidFill>
-                <a:latin typeface="Segoe UI"/>
-              </a:rPr>
-              <a:t>Prompt, retrieve, retrain — in that order, always.</a:t>
-            </a:r>
-          </a:p>
-        </p:txBody>
-      </p:sp>
-      <p:sp>
-        <p:nvSpPr>
-          <p:cNvPr id="6" name="TextBox 5"/>
           <p:cNvSpPr txBox="1"/>
           <p:nvPr/>
         </p:nvSpPr>
@@ -6108,7 +6245,7 @@
         <p:spPr>
           <a:xfrm>
             <a:off x="731520" y="502920"/>
-            <a:ext cx="10728655" cy="914400"/>
+            <a:ext cx="10728655" cy="320040"/>
           </a:xfrm>
           <a:prstGeom prst="rect">
             <a:avLst/>
@@ -6123,87 +6260,27 @@
           <a:p>
             <a:pPr algn="l"/>
             <a:r>
-              <a:rPr sz="2800" b="1">
-                <a:solidFill>
-                  <a:srgbClr val="0B2545"/>
+              <a:rPr sz="1100" b="1">
+                <a:solidFill>
+                  <a:srgbClr val="1B7A43"/>
                 </a:solidFill>
                 <a:latin typeface="Segoe UI"/>
               </a:rPr>
-              <a:t>The three levers, and where each one acts</a:t>
-            </a:r>
-          </a:p>
-        </p:txBody>
-      </p:sp>
-      <p:sp>
-        <p:nvSpPr>
-          <p:cNvPr id="4" name="Rectangle 3"/>
-          <p:cNvSpPr/>
-          <p:nvPr/>
-        </p:nvSpPr>
-        <p:spPr>
-          <a:xfrm>
-            <a:off x="731520" y="1371600"/>
-            <a:ext cx="10728655" cy="960120"/>
-          </a:xfrm>
-          <a:prstGeom prst="rect">
-            <a:avLst/>
-          </a:prstGeom>
-          <a:solidFill>
-            <a:srgbClr val="F4F8F5"/>
-          </a:solidFill>
-          <a:ln>
-            <a:solidFill>
-              <a:srgbClr val="1B7A43"/>
-            </a:solidFill>
-          </a:ln>
-          <a:effectLst/>
-        </p:spPr>
-        <p:style>
-          <a:lnRef idx="1">
-            <a:schemeClr val="accent1"/>
-          </a:lnRef>
-          <a:fillRef idx="3">
-            <a:schemeClr val="accent1"/>
-          </a:fillRef>
-          <a:effectRef idx="2">
-            <a:schemeClr val="accent1"/>
-          </a:effectRef>
-          <a:fontRef idx="minor">
-            <a:schemeClr val="lt1"/>
-          </a:fontRef>
-        </p:style>
-        <p:txBody>
-          <a:bodyPr rtlCol="0" anchor="ctr" wrap="square"/>
-          <a:lstStyle/>
-          <a:p>
-            <a:pPr algn="ctr"/>
-            <a:r>
-              <a:rPr sz="1200">
-                <a:solidFill>
-                  <a:srgbClr val="33403A"/>
-                </a:solidFill>
-                <a:latin typeface="Segoe UI"/>
-              </a:rPr>
-              <a:t>"WE WILL FINE-TUNE THE MODEL ON OUR DATA SO IT KNOWS OUR STATISTICS" — This is the sentence from slide 2, and it describes the wrong lever. Fine-tuning
-teaches a model to  write like  your office; it does not reliably teach it
-to  know  your numbers, and it gives you no way to cite a source. The
-requirement behind that sentence is almost always  RAG  — which is
-cheaper, faster, updatable the moment a figure is revised, and produces an answer
-you can trace back to a document.</a:t>
-            </a:r>
-          </a:p>
-        </p:txBody>
-      </p:sp>
-      <p:sp>
-        <p:nvSpPr>
-          <p:cNvPr id="5" name="TextBox 4"/>
+              <a:t>THE CONSEQUENCE</a:t>
+            </a:r>
+          </a:p>
+        </p:txBody>
+      </p:sp>
+      <p:sp>
+        <p:nvSpPr>
+          <p:cNvPr id="4" name="TextBox 3"/>
           <p:cNvSpPr txBox="1"/>
           <p:nvPr/>
         </p:nvSpPr>
         <p:spPr>
           <a:xfrm>
-            <a:off x="731520" y="2468880"/>
-            <a:ext cx="10728655" cy="640080"/>
+            <a:off x="731520" y="914400"/>
+            <a:ext cx="10728655" cy="548640"/>
           </a:xfrm>
           <a:prstGeom prst="rect">
             <a:avLst/>
@@ -6218,20 +6295,22 @@
           <a:p>
             <a:pPr algn="l"/>
             <a:r>
-              <a:rPr sz="1100" b="0">
-                <a:solidFill>
-                  <a:srgbClr val="6B7B75"/>
+              <a:rPr sz="1400" b="0">
+                <a:solidFill>
+                  <a:srgbClr val="33403A"/>
                 </a:solidFill>
                 <a:latin typeface="Segoe UI"/>
               </a:rPr>
-              <a:t>FIGURE — screenshot slide 6 of the HTML deck and paste it here.</a:t>
-            </a:r>
-          </a:p>
-        </p:txBody>
-      </p:sp>
-      <p:sp>
-        <p:nvSpPr>
-          <p:cNvPr id="6" name="TextBox 5"/>
+              <a:t>Plausible and true agree most of the time. That is exactly what makes the
+disagreements dangerous — and why every use in this workshop is wrapped in a
+verification step.</a:t>
+            </a:r>
+          </a:p>
+        </p:txBody>
+      </p:sp>
+      <p:sp>
+        <p:nvSpPr>
+          <p:cNvPr id="5" name="TextBox 4"/>
           <p:cNvSpPr txBox="1"/>
           <p:nvPr/>
         </p:nvSpPr>
@@ -6291,17 +6370,18 @@
         <p:spPr>
           <a:xfrm>
             <a:off x="0" y="0"/>
-            <a:ext cx="12191695" cy="60000"/>
+            <a:ext cx="12191695" cy="6858000"/>
           </a:xfrm>
           <a:prstGeom prst="rect">
             <a:avLst/>
           </a:prstGeom>
           <a:solidFill>
-            <a:srgbClr val="F2A900"/>
+            <a:srgbClr val="0B2545"/>
           </a:solidFill>
           <a:ln>
             <a:noFill/>
           </a:ln>
+          <a:effectLst/>
         </p:spPr>
         <p:style>
           <a:lnRef idx="1">
@@ -6334,7 +6414,7 @@
         <p:spPr>
           <a:xfrm>
             <a:off x="731520" y="502920"/>
-            <a:ext cx="10728655" cy="914400"/>
+            <a:ext cx="10728655" cy="320040"/>
           </a:xfrm>
           <a:prstGeom prst="rect">
             <a:avLst/>
@@ -6349,84 +6429,27 @@
           <a:p>
             <a:pPr algn="l"/>
             <a:r>
-              <a:rPr sz="2800" b="1">
-                <a:solidFill>
-                  <a:srgbClr val="0B2545"/>
+              <a:rPr sz="1100" b="1">
+                <a:solidFill>
+                  <a:srgbClr val="F2A900"/>
                 </a:solidFill>
                 <a:latin typeface="Segoe UI"/>
               </a:rPr>
-              <a:t>RAG, in the shape you will build this afternoon</a:t>
-            </a:r>
-          </a:p>
-        </p:txBody>
-      </p:sp>
-      <p:sp>
-        <p:nvSpPr>
-          <p:cNvPr id="4" name="Rectangle 3"/>
-          <p:cNvSpPr/>
-          <p:nvPr/>
-        </p:nvSpPr>
-        <p:spPr>
-          <a:xfrm>
-            <a:off x="731520" y="1371600"/>
-            <a:ext cx="10728655" cy="960120"/>
-          </a:xfrm>
-          <a:prstGeom prst="rect">
-            <a:avLst/>
-          </a:prstGeom>
-          <a:solidFill>
-            <a:srgbClr val="F4F8F5"/>
-          </a:solidFill>
-          <a:ln>
-            <a:solidFill>
-              <a:srgbClr val="1B7A43"/>
-            </a:solidFill>
-          </a:ln>
-          <a:effectLst/>
-        </p:spPr>
-        <p:style>
-          <a:lnRef idx="1">
-            <a:schemeClr val="accent1"/>
-          </a:lnRef>
-          <a:fillRef idx="3">
-            <a:schemeClr val="accent1"/>
-          </a:fillRef>
-          <a:effectRef idx="2">
-            <a:schemeClr val="accent1"/>
-          </a:effectRef>
-          <a:fontRef idx="minor">
-            <a:schemeClr val="lt1"/>
-          </a:fontRef>
-        </p:style>
-        <p:txBody>
-          <a:bodyPr rtlCol="0" anchor="ctr" wrap="square"/>
-          <a:lstStyle/>
-          <a:p>
-            <a:pPr algn="ctr"/>
-            <a:r>
-              <a:rPr sz="1200">
-                <a:solidFill>
-                  <a:srgbClr val="33403A"/>
-                </a:solidFill>
-                <a:latin typeface="Segoe UI"/>
-              </a:rPr>
-              <a:t>WHY A STATISTICAL OFFICE SHOULD CARE ABOUT STEP 3 SPECIFICALLY — An answer that cites the paragraph it came from can be checked by a human in ten
-seconds. An answer with no source has to be trusted or re-derived. Only one of
-those two is compatible with publishing under an official mark.</a:t>
-            </a:r>
-          </a:p>
-        </p:txBody>
-      </p:sp>
-      <p:sp>
-        <p:nvSpPr>
-          <p:cNvPr id="5" name="TextBox 4"/>
+              <a:t>PART 2 OF 3</a:t>
+            </a:r>
+          </a:p>
+        </p:txBody>
+      </p:sp>
+      <p:sp>
+        <p:nvSpPr>
+          <p:cNvPr id="4" name="TextBox 3"/>
           <p:cNvSpPr txBox="1"/>
           <p:nvPr/>
         </p:nvSpPr>
         <p:spPr>
           <a:xfrm>
-            <a:off x="731520" y="2468880"/>
-            <a:ext cx="10728655" cy="640080"/>
+            <a:off x="731520" y="914400"/>
+            <a:ext cx="10728655" cy="914400"/>
           </a:xfrm>
           <a:prstGeom prst="rect">
             <a:avLst/>
@@ -6441,13 +6464,48 @@
           <a:p>
             <a:pPr algn="l"/>
             <a:r>
-              <a:rPr sz="1100" b="0">
-                <a:solidFill>
-                  <a:srgbClr val="6B7B75"/>
+              <a:rPr sz="2800" b="1">
+                <a:solidFill>
+                  <a:srgbClr val="FFFFFF"/>
                 </a:solidFill>
                 <a:latin typeface="Segoe UI"/>
               </a:rPr>
-              <a:t>FIGURE — screenshot slide 7 of the HTML deck and paste it here.</a:t>
+              <a:t>Three ways to make it useful</a:t>
+            </a:r>
+          </a:p>
+        </p:txBody>
+      </p:sp>
+      <p:sp>
+        <p:nvSpPr>
+          <p:cNvPr id="5" name="TextBox 4"/>
+          <p:cNvSpPr txBox="1"/>
+          <p:nvPr/>
+        </p:nvSpPr>
+        <p:spPr>
+          <a:xfrm>
+            <a:off x="731520" y="1783080"/>
+            <a:ext cx="10728655" cy="548640"/>
+          </a:xfrm>
+          <a:prstGeom prst="rect">
+            <a:avLst/>
+          </a:prstGeom>
+          <a:noFill/>
+        </p:spPr>
+        <p:txBody>
+          <a:bodyPr wrap="square">
+            <a:spAutoFit/>
+          </a:bodyPr>
+          <a:lstStyle/>
+          <a:p>
+            <a:pPr algn="l"/>
+            <a:r>
+              <a:rPr sz="1400" b="0">
+                <a:solidFill>
+                  <a:srgbClr val="DBE7E0"/>
+                </a:solidFill>
+                <a:latin typeface="Segoe UI"/>
+              </a:rPr>
+              <a:t>Prompt, retrieve, retrain — in that order, always.</a:t>
             </a:r>
           </a:p>
         </p:txBody>
@@ -6514,18 +6572,17 @@
         <p:spPr>
           <a:xfrm>
             <a:off x="0" y="0"/>
-            <a:ext cx="12191695" cy="6858000"/>
+            <a:ext cx="12191695" cy="60000"/>
           </a:xfrm>
           <a:prstGeom prst="rect">
             <a:avLst/>
           </a:prstGeom>
           <a:solidFill>
-            <a:srgbClr val="0B2545"/>
+            <a:srgbClr val="F2A900"/>
           </a:solidFill>
           <a:ln>
             <a:noFill/>
           </a:ln>
-          <a:effectLst/>
         </p:spPr>
         <p:style>
           <a:lnRef idx="1">
@@ -6558,7 +6615,7 @@
         <p:spPr>
           <a:xfrm>
             <a:off x="731520" y="502920"/>
-            <a:ext cx="10728655" cy="320040"/>
+            <a:ext cx="10728655" cy="914400"/>
           </a:xfrm>
           <a:prstGeom prst="rect">
             <a:avLst/>
@@ -6573,13 +6630,13 @@
           <a:p>
             <a:pPr algn="l"/>
             <a:r>
-              <a:rPr sz="1100" b="1">
-                <a:solidFill>
-                  <a:srgbClr val="F2A900"/>
+              <a:rPr sz="2800" b="1">
+                <a:solidFill>
+                  <a:srgbClr val="0B2545"/>
                 </a:solidFill>
                 <a:latin typeface="Segoe UI"/>
               </a:rPr>
-              <a:t>PART 3</a:t>
+              <a:t>Three levers, three different targets</a:t>
             </a:r>
           </a:p>
         </p:txBody>
@@ -6592,8 +6649,8 @@
         </p:nvSpPr>
         <p:spPr>
           <a:xfrm>
-            <a:off x="731520" y="914400"/>
-            <a:ext cx="10728655" cy="914400"/>
+            <a:off x="731520" y="1371600"/>
+            <a:ext cx="10728655" cy="640080"/>
           </a:xfrm>
           <a:prstGeom prst="rect">
             <a:avLst/>
@@ -6608,13 +6665,13 @@
           <a:p>
             <a:pPr algn="l"/>
             <a:r>
-              <a:rPr sz="2800" b="1">
-                <a:solidFill>
-                  <a:srgbClr val="FFFFFF"/>
+              <a:rPr sz="1100" b="0">
+                <a:solidFill>
+                  <a:srgbClr val="6B7B75"/>
                 </a:solidFill>
                 <a:latin typeface="Segoe UI"/>
               </a:rPr>
-              <a:t>Agents, and where supervision goes</a:t>
+              <a:t>FIGURE — screenshot slide 8 of the HTML deck and paste it here.</a:t>
             </a:r>
           </a:p>
         </p:txBody>
@@ -6622,41 +6679,6 @@
       <p:sp>
         <p:nvSpPr>
           <p:cNvPr id="5" name="TextBox 4"/>
-          <p:cNvSpPr txBox="1"/>
-          <p:nvPr/>
-        </p:nvSpPr>
-        <p:spPr>
-          <a:xfrm>
-            <a:off x="731520" y="1783080"/>
-            <a:ext cx="10728655" cy="548640"/>
-          </a:xfrm>
-          <a:prstGeom prst="rect">
-            <a:avLst/>
-          </a:prstGeom>
-          <a:noFill/>
-        </p:spPr>
-        <p:txBody>
-          <a:bodyPr wrap="square">
-            <a:spAutoFit/>
-          </a:bodyPr>
-          <a:lstStyle/>
-          <a:p>
-            <a:pPr algn="l"/>
-            <a:r>
-              <a:rPr sz="1400" b="0">
-                <a:solidFill>
-                  <a:srgbClr val="DBE7E0"/>
-                </a:solidFill>
-                <a:latin typeface="Segoe UI"/>
-              </a:rPr>
-              <a:t>The step from "answers a question" to "takes an action".</a:t>
-            </a:r>
-          </a:p>
-        </p:txBody>
-      </p:sp>
-      <p:sp>
-        <p:nvSpPr>
-          <p:cNvPr id="6" name="TextBox 5"/>
           <p:cNvSpPr txBox="1"/>
           <p:nvPr/>
         </p:nvSpPr>
@@ -6759,7 +6781,7 @@
         <p:spPr>
           <a:xfrm>
             <a:off x="731520" y="502920"/>
-            <a:ext cx="10728655" cy="914400"/>
+            <a:ext cx="10728655" cy="320040"/>
           </a:xfrm>
           <a:prstGeom prst="rect">
             <a:avLst/>
@@ -6774,26 +6796,61 @@
           <a:p>
             <a:pPr algn="l"/>
             <a:r>
-              <a:rPr sz="2800" b="1">
-                <a:solidFill>
-                  <a:srgbClr val="0B2545"/>
+              <a:rPr sz="1100" b="1">
+                <a:solidFill>
+                  <a:srgbClr val="1B7A43"/>
                 </a:solidFill>
                 <a:latin typeface="Segoe UI"/>
               </a:rPr>
-              <a:t>Assistant → agent: one change, and it is not a small one</a:t>
-            </a:r>
-          </a:p>
-        </p:txBody>
-      </p:sp>
-      <p:sp>
-        <p:nvSpPr>
-          <p:cNvPr id="4" name="Rectangle 3"/>
+              <a:t>BACK TO SENTENCE THREE</a:t>
+            </a:r>
+          </a:p>
+        </p:txBody>
+      </p:sp>
+      <p:sp>
+        <p:nvSpPr>
+          <p:cNvPr id="4" name="TextBox 3"/>
+          <p:cNvSpPr txBox="1"/>
+          <p:nvPr/>
+        </p:nvSpPr>
+        <p:spPr>
+          <a:xfrm>
+            <a:off x="731520" y="914400"/>
+            <a:ext cx="10728655" cy="914400"/>
+          </a:xfrm>
+          <a:prstGeom prst="rect">
+            <a:avLst/>
+          </a:prstGeom>
+          <a:noFill/>
+        </p:spPr>
+        <p:txBody>
+          <a:bodyPr wrap="square">
+            <a:spAutoFit/>
+          </a:bodyPr>
+          <a:lstStyle/>
+          <a:p>
+            <a:pPr algn="l"/>
+            <a:r>
+              <a:rPr sz="2800" b="1">
+                <a:solidFill>
+                  <a:srgbClr val="0B2545"/>
+                </a:solidFill>
+                <a:latin typeface="Segoe UI"/>
+              </a:rPr>
+              <a:t>“Fine-tune it so it knows our statistics”</a:t>
+            </a:r>
+          </a:p>
+        </p:txBody>
+      </p:sp>
+      <p:sp>
+        <p:nvSpPr>
+          <p:cNvPr id="5" name="Rectangle 4"/>
           <p:cNvSpPr/>
           <p:nvPr/>
         </p:nvSpPr>
         <p:spPr>
           <a:xfrm>
-            <a:off x="731520" y="1371600"/>
+            <a:off x="731520" y="1783080"/>
             <a:ext cx="10728655" cy="960120"/>
           </a:xfrm>
           <a:prstGeom prst="rect">
@@ -6835,367 +6892,16 @@
                 </a:solidFill>
                 <a:latin typeface="Segoe UI"/>
               </a:rPr>
-              <a:t>THE WORD "TOOL" IS DOING A LOT OF WORK HERE — A tool is any function you let the model call: a database query, a retrieval step,
-a file write, an email. The model does not run the tool —  your code does ,
-after the model asks for it. That gap is where every approval gate, audit log and
-safety check lives. Design it before you need it.</a:t>
-            </a:r>
-          </a:p>
-        </p:txBody>
-      </p:sp>
-      <p:graphicFrame>
-        <p:nvGraphicFramePr>
-          <p:cNvPr id="5" name="Table 4"/>
-          <p:cNvGraphicFramePr>
-            <a:graphicFrameLocks noGrp="1"/>
-          </p:cNvGraphicFramePr>
-          <p:nvPr/>
-        </p:nvGraphicFramePr>
-        <p:xfrm>
-          <a:off x="731520" y="2468880"/>
-          <a:ext cx="10728655" cy="1755648"/>
-        </p:xfrm>
-        <a:graphic>
-          <a:graphicData uri="http://schemas.openxmlformats.org/drawingml/2006/table">
-            <a:tbl>
-              <a:tblPr firstRow="1" bandRow="1">
-                <a:tableStyleId>{5C22544A-7EE6-4342-B048-85BDC9FD1C3A}</a:tableStyleId>
-              </a:tblPr>
-              <a:tblGrid>
-                <a:gridCol w="3576218"/>
-                <a:gridCol w="3576218"/>
-                <a:gridCol w="3576219"/>
-              </a:tblGrid>
-              <a:tr h="292608">
-                <a:tc>
-                  <a:txBody>
-                    <a:bodyPr/>
-                    <a:lstStyle/>
-                    <a:p/>
-                  </a:txBody>
-                  <a:tcPr/>
-                </a:tc>
-                <a:tc>
-                  <a:txBody>
-                    <a:bodyPr/>
-                    <a:lstStyle/>
-                    <a:p>
-                      <a:r>
-                        <a:rPr sz="1000" b="1">
-                          <a:solidFill>
-                            <a:srgbClr val="FFFFFF"/>
-                          </a:solidFill>
-                          <a:latin typeface="Segoe UI"/>
-                        </a:rPr>
-                        <a:t>Assistant (what you build at 14:45)</a:t>
-                      </a:r>
-                    </a:p>
-                  </a:txBody>
-                  <a:tcPr/>
-                </a:tc>
-                <a:tc>
-                  <a:txBody>
-                    <a:bodyPr/>
-                    <a:lstStyle/>
-                    <a:p>
-                      <a:r>
-                        <a:rPr sz="1000" b="1">
-                          <a:solidFill>
-                            <a:srgbClr val="FFFFFF"/>
-                          </a:solidFill>
-                          <a:latin typeface="Segoe UI"/>
-                        </a:rPr>
-                        <a:t>Agent (what you build at 15:45)</a:t>
-                      </a:r>
-                    </a:p>
-                  </a:txBody>
-                  <a:tcPr/>
-                </a:tc>
-              </a:tr>
-              <a:tr h="292608">
-                <a:tc>
-                  <a:txBody>
-                    <a:bodyPr/>
-                    <a:lstStyle/>
-                    <a:p>
-                      <a:r>
-                        <a:rPr sz="1000" b="0">
-                          <a:solidFill>
-                            <a:srgbClr val="33403A"/>
-                          </a:solidFill>
-                          <a:latin typeface="Segoe UI"/>
-                        </a:rPr>
-                        <a:t>What it does</a:t>
-                      </a:r>
-                    </a:p>
-                  </a:txBody>
-                  <a:tcPr/>
-                </a:tc>
-                <a:tc>
-                  <a:txBody>
-                    <a:bodyPr/>
-                    <a:lstStyle/>
-                    <a:p>
-                      <a:r>
-                        <a:rPr sz="1000" b="0">
-                          <a:solidFill>
-                            <a:srgbClr val="33403A"/>
-                          </a:solidFill>
-                          <a:latin typeface="Segoe UI"/>
-                        </a:rPr>
-                        <a:t>Reads, then writes an answer</a:t>
-                      </a:r>
-                    </a:p>
-                  </a:txBody>
-                  <a:tcPr/>
-                </a:tc>
-                <a:tc>
-                  <a:txBody>
-                    <a:bodyPr/>
-                    <a:lstStyle/>
-                    <a:p>
-                      <a:r>
-                        <a:rPr sz="1000" b="0">
-                          <a:solidFill>
-                            <a:srgbClr val="33403A"/>
-                          </a:solidFill>
-                          <a:latin typeface="Segoe UI"/>
-                        </a:rPr>
-                        <a:t>Reads, then  decides which tool to call , calls it, reads the result, repeats</a:t>
-                      </a:r>
-                    </a:p>
-                  </a:txBody>
-                  <a:tcPr/>
-                </a:tc>
-              </a:tr>
-              <a:tr h="292608">
-                <a:tc>
-                  <a:txBody>
-                    <a:bodyPr/>
-                    <a:lstStyle/>
-                    <a:p>
-                      <a:r>
-                        <a:rPr sz="1000" b="0">
-                          <a:solidFill>
-                            <a:srgbClr val="33403A"/>
-                          </a:solidFill>
-                          <a:latin typeface="Segoe UI"/>
-                        </a:rPr>
-                        <a:t>Who chooses the steps</a:t>
-                      </a:r>
-                    </a:p>
-                  </a:txBody>
-                  <a:tcPr/>
-                </a:tc>
-                <a:tc>
-                  <a:txBody>
-                    <a:bodyPr/>
-                    <a:lstStyle/>
-                    <a:p>
-                      <a:r>
-                        <a:rPr sz="1000" b="0">
-                          <a:solidFill>
-                            <a:srgbClr val="33403A"/>
-                          </a:solidFill>
-                          <a:latin typeface="Segoe UI"/>
-                        </a:rPr>
-                        <a:t>You did, when you wrote the pipeline</a:t>
-                      </a:r>
-                    </a:p>
-                  </a:txBody>
-                  <a:tcPr/>
-                </a:tc>
-                <a:tc>
-                  <a:txBody>
-                    <a:bodyPr/>
-                    <a:lstStyle/>
-                    <a:p>
-                      <a:r>
-                        <a:rPr sz="1000" b="0">
-                          <a:solidFill>
-                            <a:srgbClr val="33403A"/>
-                          </a:solidFill>
-                          <a:latin typeface="Segoe UI"/>
-                        </a:rPr>
-                        <a:t>The model does, at run time</a:t>
-                      </a:r>
-                    </a:p>
-                  </a:txBody>
-                  <a:tcPr/>
-                </a:tc>
-              </a:tr>
-              <a:tr h="292608">
-                <a:tc>
-                  <a:txBody>
-                    <a:bodyPr/>
-                    <a:lstStyle/>
-                    <a:p>
-                      <a:r>
-                        <a:rPr sz="1000" b="0">
-                          <a:solidFill>
-                            <a:srgbClr val="33403A"/>
-                          </a:solidFill>
-                          <a:latin typeface="Segoe UI"/>
-                        </a:rPr>
-                        <a:t>Failure looks like</a:t>
-                      </a:r>
-                    </a:p>
-                  </a:txBody>
-                  <a:tcPr/>
-                </a:tc>
-                <a:tc>
-                  <a:txBody>
-                    <a:bodyPr/>
-                    <a:lstStyle/>
-                    <a:p>
-                      <a:r>
-                        <a:rPr sz="1000" b="0">
-                          <a:solidFill>
-                            <a:srgbClr val="33403A"/>
-                          </a:solidFill>
-                          <a:latin typeface="Segoe UI"/>
-                        </a:rPr>
-                        <a:t>A wrong sentence</a:t>
-                      </a:r>
-                    </a:p>
-                  </a:txBody>
-                  <a:tcPr/>
-                </a:tc>
-                <a:tc>
-                  <a:txBody>
-                    <a:bodyPr/>
-                    <a:lstStyle/>
-                    <a:p>
-                      <a:r>
-                        <a:rPr sz="1000" b="0">
-                          <a:solidFill>
-                            <a:srgbClr val="33403A"/>
-                          </a:solidFill>
-                          <a:latin typeface="Segoe UI"/>
-                        </a:rPr>
-                        <a:t>A wrong sentence, or a wrong  action , or a loop that will not stop</a:t>
-                      </a:r>
-                    </a:p>
-                  </a:txBody>
-                  <a:tcPr/>
-                </a:tc>
-              </a:tr>
-              <a:tr h="292608">
-                <a:tc>
-                  <a:txBody>
-                    <a:bodyPr/>
-                    <a:lstStyle/>
-                    <a:p>
-                      <a:r>
-                        <a:rPr sz="1000" b="0">
-                          <a:solidFill>
-                            <a:srgbClr val="33403A"/>
-                          </a:solidFill>
-                          <a:latin typeface="Segoe UI"/>
-                        </a:rPr>
-                        <a:t>What it costs</a:t>
-                      </a:r>
-                    </a:p>
-                  </a:txBody>
-                  <a:tcPr/>
-                </a:tc>
-                <a:tc>
-                  <a:txBody>
-                    <a:bodyPr/>
-                    <a:lstStyle/>
-                    <a:p>
-                      <a:r>
-                        <a:rPr sz="1000" b="0">
-                          <a:solidFill>
-                            <a:srgbClr val="33403A"/>
-                          </a:solidFill>
-                          <a:latin typeface="Segoe UI"/>
-                        </a:rPr>
-                        <a:t>One model call</a:t>
-                      </a:r>
-                    </a:p>
-                  </a:txBody>
-                  <a:tcPr/>
-                </a:tc>
-                <a:tc>
-                  <a:txBody>
-                    <a:bodyPr/>
-                    <a:lstStyle/>
-                    <a:p>
-                      <a:r>
-                        <a:rPr sz="1000" b="0">
-                          <a:solidFill>
-                            <a:srgbClr val="33403A"/>
-                          </a:solidFill>
-                          <a:latin typeface="Segoe UI"/>
-                        </a:rPr>
-                        <a:t>As many calls as it decides to make</a:t>
-                      </a:r>
-                    </a:p>
-                  </a:txBody>
-                  <a:tcPr/>
-                </a:tc>
-              </a:tr>
-              <a:tr h="292608">
-                <a:tc>
-                  <a:txBody>
-                    <a:bodyPr/>
-                    <a:lstStyle/>
-                    <a:p>
-                      <a:r>
-                        <a:rPr sz="1000" b="0">
-                          <a:solidFill>
-                            <a:srgbClr val="33403A"/>
-                          </a:solidFill>
-                          <a:latin typeface="Segoe UI"/>
-                        </a:rPr>
-                        <a:t>Where a human belongs</a:t>
-                      </a:r>
-                    </a:p>
-                  </a:txBody>
-                  <a:tcPr/>
-                </a:tc>
-                <a:tc>
-                  <a:txBody>
-                    <a:bodyPr/>
-                    <a:lstStyle/>
-                    <a:p>
-                      <a:r>
-                        <a:rPr sz="1000" b="0">
-                          <a:solidFill>
-                            <a:srgbClr val="33403A"/>
-                          </a:solidFill>
-                          <a:latin typeface="Segoe UI"/>
-                        </a:rPr>
-                        <a:t>Checking the output before publication</a:t>
-                      </a:r>
-                    </a:p>
-                  </a:txBody>
-                  <a:tcPr/>
-                </a:tc>
-                <a:tc>
-                  <a:txBody>
-                    <a:bodyPr/>
-                    <a:lstStyle/>
-                    <a:p>
-                      <a:r>
-                        <a:rPr sz="1000" b="0">
-                          <a:solidFill>
-                            <a:srgbClr val="33403A"/>
-                          </a:solidFill>
-                          <a:latin typeface="Segoe UI"/>
-                        </a:rPr>
-                        <a:t>Checking the output  and  approving actions before they happen</a:t>
-                      </a:r>
-                    </a:p>
-                  </a:txBody>
-                  <a:tcPr/>
-                </a:tc>
-              </a:tr>
-            </a:tbl>
-          </a:graphicData>
-        </a:graphic>
-      </p:graphicFrame>
+              <a:t>THIS NAMES THE WRONG LEVER — Fine-tuning teaches a model to  write like  your office. It does not
+reliably teach it to  know  your numbers, and it gives you no way to cite
+a source.  
+The requirement behind that sentence is almost always  RAG :
+cheaper, faster, updated the moment a figure is revised, and traceable to a
+document.</a:t>
+            </a:r>
+          </a:p>
+        </p:txBody>
+      </p:sp>
       <p:sp>
         <p:nvSpPr>
           <p:cNvPr id="6" name="TextBox 5"/>

--- a/docs/slides/pptx/01-ai-family-tree-en.pptx
+++ b/docs/slides/pptx/01-ai-family-tree-en.pptx
@@ -6844,13 +6844,48 @@
       </p:sp>
       <p:sp>
         <p:nvSpPr>
-          <p:cNvPr id="5" name="Rectangle 4"/>
+          <p:cNvPr id="5" name="TextBox 4"/>
+          <p:cNvSpPr txBox="1"/>
+          <p:nvPr/>
+        </p:nvSpPr>
+        <p:spPr>
+          <a:xfrm>
+            <a:off x="731520" y="1783080"/>
+            <a:ext cx="10728655" cy="548640"/>
+          </a:xfrm>
+          <a:prstGeom prst="rect">
+            <a:avLst/>
+          </a:prstGeom>
+          <a:noFill/>
+        </p:spPr>
+        <p:txBody>
+          <a:bodyPr wrap="square">
+            <a:spAutoFit/>
+          </a:bodyPr>
+          <a:lstStyle/>
+          <a:p>
+            <a:pPr algn="l"/>
+            <a:r>
+              <a:rPr sz="1400" b="0">
+                <a:solidFill>
+                  <a:srgbClr val="33403A"/>
+                </a:solidFill>
+                <a:latin typeface="Segoe UI"/>
+              </a:rPr>
+              <a:t>The most expensive sentence in the room.</a:t>
+            </a:r>
+          </a:p>
+        </p:txBody>
+      </p:sp>
+      <p:sp>
+        <p:nvSpPr>
+          <p:cNvPr id="6" name="Rectangle 5"/>
           <p:cNvSpPr/>
           <p:nvPr/>
         </p:nvSpPr>
         <p:spPr>
           <a:xfrm>
-            <a:off x="731520" y="1783080"/>
+            <a:off x="731520" y="2286000"/>
             <a:ext cx="10728655" cy="960120"/>
           </a:xfrm>
           <a:prstGeom prst="rect">
@@ -6904,7 +6939,7 @@
       </p:sp>
       <p:sp>
         <p:nvSpPr>
-          <p:cNvPr id="6" name="TextBox 5"/>
+          <p:cNvPr id="7" name="TextBox 6"/>
           <p:cNvSpPr txBox="1"/>
           <p:nvPr/>
         </p:nvSpPr>
